--- a/Pregrado/Trabajo de grado 3/Clases/Sesion 12 - Sustentación ante jurados/Presentacion.pptx
+++ b/Pregrado/Trabajo de grado 3/Clases/Sesion 12 - Sustentación ante jurados/Presentacion.pptx
@@ -3367,41 +3367,6 @@
                 <a:latin typeface="Calibri"/>
               </a:rPr>
               <a:t> TRABAJO DE GRADO 3</a:t>
-            </a:r>
-          </a:p>
-        </p:txBody>
-      </p:sp>
-      <p:sp>
-        <p:nvSpPr>
-          <p:cNvPr id="7" name="TextBox 6"/>
-          <p:cNvSpPr txBox="1"/>
-          <p:nvPr/>
-        </p:nvSpPr>
-        <p:spPr>
-          <a:xfrm>
-            <a:off x="2194560" y="6446520"/>
-            <a:ext cx="5943600" cy="274320"/>
-          </a:xfrm>
-          <a:prstGeom prst="rect">
-            <a:avLst/>
-          </a:prstGeom>
-          <a:noFill/>
-        </p:spPr>
-        <p:txBody>
-          <a:bodyPr wrap="square" anchor="t" lIns="0" rIns="0" tIns="0" bIns="0">
-            <a:spAutoFit/>
-          </a:bodyPr>
-          <a:lstStyle/>
-          <a:p>
-            <a:pPr algn="l"/>
-            <a:r>
-              <a:rPr sz="1000" b="1" i="0">
-                <a:solidFill>
-                  <a:srgbClr val="8F989D"/>
-                </a:solidFill>
-                <a:latin typeface="Calibri"/>
-              </a:rPr>
-              <a:t>Inicio 5:10 pm</a:t>
             </a:r>
           </a:p>
         </p:txBody>
@@ -4166,41 +4131,6 @@
         </p:nvSpPr>
         <p:spPr>
           <a:xfrm>
-            <a:off x="2194560" y="6446520"/>
-            <a:ext cx="5943600" cy="274320"/>
-          </a:xfrm>
-          <a:prstGeom prst="rect">
-            <a:avLst/>
-          </a:prstGeom>
-          <a:noFill/>
-        </p:spPr>
-        <p:txBody>
-          <a:bodyPr wrap="square" anchor="t" lIns="0" rIns="0" tIns="0" bIns="0">
-            <a:spAutoFit/>
-          </a:bodyPr>
-          <a:lstStyle/>
-          <a:p>
-            <a:pPr algn="l"/>
-            <a:r>
-              <a:rPr sz="1000" b="1" i="0">
-                <a:solidFill>
-                  <a:srgbClr val="8F989D"/>
-                </a:solidFill>
-                <a:latin typeface="Calibri"/>
-              </a:rPr>
-              <a:t>Inicio 5:10 pm</a:t>
-            </a:r>
-          </a:p>
-        </p:txBody>
-      </p:sp>
-      <p:sp>
-        <p:nvSpPr>
-          <p:cNvPr id="7" name="TextBox 6"/>
-          <p:cNvSpPr txBox="1"/>
-          <p:nvPr/>
-        </p:nvSpPr>
-        <p:spPr>
-          <a:xfrm>
             <a:off x="11094415" y="6446520"/>
             <a:ext cx="548640" cy="274320"/>
           </a:xfrm>
@@ -4652,41 +4582,6 @@
         </p:nvSpPr>
         <p:spPr>
           <a:xfrm>
-            <a:off x="2194560" y="6446520"/>
-            <a:ext cx="5943600" cy="274320"/>
-          </a:xfrm>
-          <a:prstGeom prst="rect">
-            <a:avLst/>
-          </a:prstGeom>
-          <a:noFill/>
-        </p:spPr>
-        <p:txBody>
-          <a:bodyPr wrap="square" anchor="t" lIns="0" rIns="0" tIns="0" bIns="0">
-            <a:spAutoFit/>
-          </a:bodyPr>
-          <a:lstStyle/>
-          <a:p>
-            <a:pPr algn="l"/>
-            <a:r>
-              <a:rPr sz="1000" b="1" i="0">
-                <a:solidFill>
-                  <a:srgbClr val="8F989D"/>
-                </a:solidFill>
-                <a:latin typeface="Calibri"/>
-              </a:rPr>
-              <a:t>Inicio 5:10 pm</a:t>
-            </a:r>
-          </a:p>
-        </p:txBody>
-      </p:sp>
-      <p:sp>
-        <p:nvSpPr>
-          <p:cNvPr id="6" name="TextBox 5"/>
-          <p:cNvSpPr txBox="1"/>
-          <p:nvPr/>
-        </p:nvSpPr>
-        <p:spPr>
-          <a:xfrm>
             <a:off x="11094415" y="6446520"/>
             <a:ext cx="548640" cy="274320"/>
           </a:xfrm>
@@ -4884,41 +4779,6 @@
         </p:nvSpPr>
         <p:spPr>
           <a:xfrm>
-            <a:off x="2194560" y="6446520"/>
-            <a:ext cx="5943600" cy="274320"/>
-          </a:xfrm>
-          <a:prstGeom prst="rect">
-            <a:avLst/>
-          </a:prstGeom>
-          <a:noFill/>
-        </p:spPr>
-        <p:txBody>
-          <a:bodyPr wrap="square" anchor="t" lIns="0" rIns="0" tIns="0" bIns="0">
-            <a:spAutoFit/>
-          </a:bodyPr>
-          <a:lstStyle/>
-          <a:p>
-            <a:pPr algn="l"/>
-            <a:r>
-              <a:rPr sz="1000" b="1" i="0">
-                <a:solidFill>
-                  <a:srgbClr val="8F989D"/>
-                </a:solidFill>
-                <a:latin typeface="Calibri"/>
-              </a:rPr>
-              <a:t>Inicio 5:10 pm</a:t>
-            </a:r>
-          </a:p>
-        </p:txBody>
-      </p:sp>
-      <p:sp>
-        <p:nvSpPr>
-          <p:cNvPr id="6" name="TextBox 5"/>
-          <p:cNvSpPr txBox="1"/>
-          <p:nvPr/>
-        </p:nvSpPr>
-        <p:spPr>
-          <a:xfrm>
             <a:off x="11094415" y="6446520"/>
             <a:ext cx="548640" cy="274320"/>
           </a:xfrm>
@@ -5460,41 +5320,6 @@
         </p:nvSpPr>
         <p:spPr>
           <a:xfrm>
-            <a:off x="2194560" y="6446520"/>
-            <a:ext cx="5943600" cy="274320"/>
-          </a:xfrm>
-          <a:prstGeom prst="rect">
-            <a:avLst/>
-          </a:prstGeom>
-          <a:noFill/>
-        </p:spPr>
-        <p:txBody>
-          <a:bodyPr wrap="square" anchor="t" lIns="0" rIns="0" tIns="0" bIns="0">
-            <a:spAutoFit/>
-          </a:bodyPr>
-          <a:lstStyle/>
-          <a:p>
-            <a:pPr algn="l"/>
-            <a:r>
-              <a:rPr sz="1000" b="1" i="0">
-                <a:solidFill>
-                  <a:srgbClr val="8F989D"/>
-                </a:solidFill>
-                <a:latin typeface="Calibri"/>
-              </a:rPr>
-              <a:t>Inicio 5:10 pm</a:t>
-            </a:r>
-          </a:p>
-        </p:txBody>
-      </p:sp>
-      <p:sp>
-        <p:nvSpPr>
-          <p:cNvPr id="6" name="TextBox 5"/>
-          <p:cNvSpPr txBox="1"/>
-          <p:nvPr/>
-        </p:nvSpPr>
-        <p:spPr>
-          <a:xfrm>
             <a:off x="11094415" y="6446520"/>
             <a:ext cx="548640" cy="274320"/>
           </a:xfrm>
@@ -6038,41 +5863,6 @@
         </p:nvSpPr>
         <p:spPr>
           <a:xfrm>
-            <a:off x="2194560" y="6446520"/>
-            <a:ext cx="5943600" cy="274320"/>
-          </a:xfrm>
-          <a:prstGeom prst="rect">
-            <a:avLst/>
-          </a:prstGeom>
-          <a:noFill/>
-        </p:spPr>
-        <p:txBody>
-          <a:bodyPr wrap="square" anchor="t" lIns="0" rIns="0" tIns="0" bIns="0">
-            <a:spAutoFit/>
-          </a:bodyPr>
-          <a:lstStyle/>
-          <a:p>
-            <a:pPr algn="l"/>
-            <a:r>
-              <a:rPr sz="1000" b="1" i="0">
-                <a:solidFill>
-                  <a:srgbClr val="8F989D"/>
-                </a:solidFill>
-                <a:latin typeface="Calibri"/>
-              </a:rPr>
-              <a:t>Inicio 5:10 pm</a:t>
-            </a:r>
-          </a:p>
-        </p:txBody>
-      </p:sp>
-      <p:sp>
-        <p:nvSpPr>
-          <p:cNvPr id="13" name="TextBox 12"/>
-          <p:cNvSpPr txBox="1"/>
-          <p:nvPr/>
-        </p:nvSpPr>
-        <p:spPr>
-          <a:xfrm>
             <a:off x="11094415" y="6446520"/>
             <a:ext cx="548640" cy="274320"/>
           </a:xfrm>
@@ -6625,41 +6415,6 @@
         </p:nvSpPr>
         <p:spPr>
           <a:xfrm>
-            <a:off x="2194560" y="6446520"/>
-            <a:ext cx="5943600" cy="274320"/>
-          </a:xfrm>
-          <a:prstGeom prst="rect">
-            <a:avLst/>
-          </a:prstGeom>
-          <a:noFill/>
-        </p:spPr>
-        <p:txBody>
-          <a:bodyPr wrap="square" anchor="t" lIns="0" rIns="0" tIns="0" bIns="0">
-            <a:spAutoFit/>
-          </a:bodyPr>
-          <a:lstStyle/>
-          <a:p>
-            <a:pPr algn="l"/>
-            <a:r>
-              <a:rPr sz="1000" b="1" i="0">
-                <a:solidFill>
-                  <a:srgbClr val="8F989D"/>
-                </a:solidFill>
-                <a:latin typeface="Calibri"/>
-              </a:rPr>
-              <a:t>Inicio 5:10 pm</a:t>
-            </a:r>
-          </a:p>
-        </p:txBody>
-      </p:sp>
-      <p:sp>
-        <p:nvSpPr>
-          <p:cNvPr id="13" name="TextBox 12"/>
-          <p:cNvSpPr txBox="1"/>
-          <p:nvPr/>
-        </p:nvSpPr>
-        <p:spPr>
-          <a:xfrm>
             <a:off x="11094415" y="6446520"/>
             <a:ext cx="548640" cy="274320"/>
           </a:xfrm>
@@ -6894,41 +6649,6 @@
         </p:nvSpPr>
         <p:spPr>
           <a:xfrm>
-            <a:off x="2194560" y="6446520"/>
-            <a:ext cx="5943600" cy="274320"/>
-          </a:xfrm>
-          <a:prstGeom prst="rect">
-            <a:avLst/>
-          </a:prstGeom>
-          <a:noFill/>
-        </p:spPr>
-        <p:txBody>
-          <a:bodyPr wrap="square" anchor="t" lIns="0" rIns="0" tIns="0" bIns="0">
-            <a:spAutoFit/>
-          </a:bodyPr>
-          <a:lstStyle/>
-          <a:p>
-            <a:pPr algn="l"/>
-            <a:r>
-              <a:rPr sz="1000" b="1" i="0">
-                <a:solidFill>
-                  <a:srgbClr val="8F989D"/>
-                </a:solidFill>
-                <a:latin typeface="Calibri"/>
-              </a:rPr>
-              <a:t>Inicio 5:10 pm</a:t>
-            </a:r>
-          </a:p>
-        </p:txBody>
-      </p:sp>
-      <p:sp>
-        <p:nvSpPr>
-          <p:cNvPr id="7" name="TextBox 6"/>
-          <p:cNvSpPr txBox="1"/>
-          <p:nvPr/>
-        </p:nvSpPr>
-        <p:spPr>
-          <a:xfrm>
             <a:off x="11094415" y="6446520"/>
             <a:ext cx="548640" cy="274320"/>
           </a:xfrm>
@@ -7560,41 +7280,6 @@
         </p:nvSpPr>
         <p:spPr>
           <a:xfrm>
-            <a:off x="2194560" y="6446520"/>
-            <a:ext cx="5943600" cy="274320"/>
-          </a:xfrm>
-          <a:prstGeom prst="rect">
-            <a:avLst/>
-          </a:prstGeom>
-          <a:noFill/>
-        </p:spPr>
-        <p:txBody>
-          <a:bodyPr wrap="square" anchor="t" lIns="0" rIns="0" tIns="0" bIns="0">
-            <a:spAutoFit/>
-          </a:bodyPr>
-          <a:lstStyle/>
-          <a:p>
-            <a:pPr algn="l"/>
-            <a:r>
-              <a:rPr sz="1000" b="1" i="0">
-                <a:solidFill>
-                  <a:srgbClr val="8F989D"/>
-                </a:solidFill>
-                <a:latin typeface="Calibri"/>
-              </a:rPr>
-              <a:t>Inicio 5:10 pm</a:t>
-            </a:r>
-          </a:p>
-        </p:txBody>
-      </p:sp>
-      <p:sp>
-        <p:nvSpPr>
-          <p:cNvPr id="6" name="TextBox 5"/>
-          <p:cNvSpPr txBox="1"/>
-          <p:nvPr/>
-        </p:nvSpPr>
-        <p:spPr>
-          <a:xfrm>
             <a:off x="11094415" y="6446520"/>
             <a:ext cx="548640" cy="274320"/>
           </a:xfrm>
@@ -7624,7 +7309,7 @@
       </p:sp>
       <p:sp>
         <p:nvSpPr>
-          <p:cNvPr id="7" name="TextBox 6"/>
+          <p:cNvPr id="6" name="TextBox 5"/>
           <p:cNvSpPr txBox="1"/>
           <p:nvPr/>
         </p:nvSpPr>
@@ -8086,41 +7771,6 @@
         </p:nvSpPr>
         <p:spPr>
           <a:xfrm>
-            <a:off x="2194560" y="6446520"/>
-            <a:ext cx="5943600" cy="274320"/>
-          </a:xfrm>
-          <a:prstGeom prst="rect">
-            <a:avLst/>
-          </a:prstGeom>
-          <a:noFill/>
-        </p:spPr>
-        <p:txBody>
-          <a:bodyPr wrap="square" anchor="t" lIns="0" rIns="0" tIns="0" bIns="0">
-            <a:spAutoFit/>
-          </a:bodyPr>
-          <a:lstStyle/>
-          <a:p>
-            <a:pPr algn="l"/>
-            <a:r>
-              <a:rPr sz="1000" b="1" i="0">
-                <a:solidFill>
-                  <a:srgbClr val="8F989D"/>
-                </a:solidFill>
-                <a:latin typeface="Calibri"/>
-              </a:rPr>
-              <a:t>Inicio 5:10 pm</a:t>
-            </a:r>
-          </a:p>
-        </p:txBody>
-      </p:sp>
-      <p:sp>
-        <p:nvSpPr>
-          <p:cNvPr id="6" name="TextBox 5"/>
-          <p:cNvSpPr txBox="1"/>
-          <p:nvPr/>
-        </p:nvSpPr>
-        <p:spPr>
-          <a:xfrm>
             <a:off x="11094415" y="6446520"/>
             <a:ext cx="548640" cy="274320"/>
           </a:xfrm>
@@ -8445,41 +8095,6 @@
         </p:nvSpPr>
         <p:spPr>
           <a:xfrm>
-            <a:off x="2194560" y="6446520"/>
-            <a:ext cx="5943600" cy="274320"/>
-          </a:xfrm>
-          <a:prstGeom prst="rect">
-            <a:avLst/>
-          </a:prstGeom>
-          <a:noFill/>
-        </p:spPr>
-        <p:txBody>
-          <a:bodyPr wrap="square" anchor="t" lIns="0" rIns="0" tIns="0" bIns="0">
-            <a:spAutoFit/>
-          </a:bodyPr>
-          <a:lstStyle/>
-          <a:p>
-            <a:pPr algn="l"/>
-            <a:r>
-              <a:rPr sz="1000" b="1" i="0">
-                <a:solidFill>
-                  <a:srgbClr val="8F989D"/>
-                </a:solidFill>
-                <a:latin typeface="Calibri"/>
-              </a:rPr>
-              <a:t>Inicio 5:10 pm</a:t>
-            </a:r>
-          </a:p>
-        </p:txBody>
-      </p:sp>
-      <p:sp>
-        <p:nvSpPr>
-          <p:cNvPr id="6" name="TextBox 5"/>
-          <p:cNvSpPr txBox="1"/>
-          <p:nvPr/>
-        </p:nvSpPr>
-        <p:spPr>
-          <a:xfrm>
             <a:off x="11094415" y="6446520"/>
             <a:ext cx="548640" cy="274320"/>
           </a:xfrm>
@@ -8931,41 +8546,6 @@
         </p:nvSpPr>
         <p:spPr>
           <a:xfrm>
-            <a:off x="2194560" y="6446520"/>
-            <a:ext cx="5943600" cy="274320"/>
-          </a:xfrm>
-          <a:prstGeom prst="rect">
-            <a:avLst/>
-          </a:prstGeom>
-          <a:noFill/>
-        </p:spPr>
-        <p:txBody>
-          <a:bodyPr wrap="square" anchor="t" lIns="0" rIns="0" tIns="0" bIns="0">
-            <a:spAutoFit/>
-          </a:bodyPr>
-          <a:lstStyle/>
-          <a:p>
-            <a:pPr algn="l"/>
-            <a:r>
-              <a:rPr sz="1000" b="1" i="0">
-                <a:solidFill>
-                  <a:srgbClr val="8F989D"/>
-                </a:solidFill>
-                <a:latin typeface="Calibri"/>
-              </a:rPr>
-              <a:t>Inicio 5:10 pm</a:t>
-            </a:r>
-          </a:p>
-        </p:txBody>
-      </p:sp>
-      <p:sp>
-        <p:nvSpPr>
-          <p:cNvPr id="6" name="TextBox 5"/>
-          <p:cNvSpPr txBox="1"/>
-          <p:nvPr/>
-        </p:nvSpPr>
-        <p:spPr>
-          <a:xfrm>
             <a:off x="11094415" y="6446520"/>
             <a:ext cx="548640" cy="274320"/>
           </a:xfrm>
@@ -8995,7 +8575,7 @@
       </p:sp>
       <p:sp>
         <p:nvSpPr>
-          <p:cNvPr id="7" name="TextBox 6"/>
+          <p:cNvPr id="6" name="TextBox 5"/>
           <p:cNvSpPr txBox="1"/>
           <p:nvPr/>
         </p:nvSpPr>
@@ -9753,41 +9333,6 @@
         </p:nvSpPr>
         <p:spPr>
           <a:xfrm>
-            <a:off x="2194560" y="6446520"/>
-            <a:ext cx="5943600" cy="274320"/>
-          </a:xfrm>
-          <a:prstGeom prst="rect">
-            <a:avLst/>
-          </a:prstGeom>
-          <a:noFill/>
-        </p:spPr>
-        <p:txBody>
-          <a:bodyPr wrap="square" anchor="t" lIns="0" rIns="0" tIns="0" bIns="0">
-            <a:spAutoFit/>
-          </a:bodyPr>
-          <a:lstStyle/>
-          <a:p>
-            <a:pPr algn="l"/>
-            <a:r>
-              <a:rPr sz="1000" b="1" i="0">
-                <a:solidFill>
-                  <a:srgbClr val="8F989D"/>
-                </a:solidFill>
-                <a:latin typeface="Calibri"/>
-              </a:rPr>
-              <a:t>Inicio 5:10 pm</a:t>
-            </a:r>
-          </a:p>
-        </p:txBody>
-      </p:sp>
-      <p:sp>
-        <p:nvSpPr>
-          <p:cNvPr id="6" name="TextBox 5"/>
-          <p:cNvSpPr txBox="1"/>
-          <p:nvPr/>
-        </p:nvSpPr>
-        <p:spPr>
-          <a:xfrm>
             <a:off x="11094415" y="6446520"/>
             <a:ext cx="548640" cy="274320"/>
           </a:xfrm>
@@ -10257,41 +9802,6 @@
         </p:nvSpPr>
         <p:spPr>
           <a:xfrm>
-            <a:off x="2194560" y="6446520"/>
-            <a:ext cx="5943600" cy="274320"/>
-          </a:xfrm>
-          <a:prstGeom prst="rect">
-            <a:avLst/>
-          </a:prstGeom>
-          <a:noFill/>
-        </p:spPr>
-        <p:txBody>
-          <a:bodyPr wrap="square" anchor="t" lIns="0" rIns="0" tIns="0" bIns="0">
-            <a:spAutoFit/>
-          </a:bodyPr>
-          <a:lstStyle/>
-          <a:p>
-            <a:pPr algn="l"/>
-            <a:r>
-              <a:rPr sz="1000" b="1" i="0">
-                <a:solidFill>
-                  <a:srgbClr val="8F989D"/>
-                </a:solidFill>
-                <a:latin typeface="Calibri"/>
-              </a:rPr>
-              <a:t>Inicio 5:10 pm</a:t>
-            </a:r>
-          </a:p>
-        </p:txBody>
-      </p:sp>
-      <p:sp>
-        <p:nvSpPr>
-          <p:cNvPr id="6" name="TextBox 5"/>
-          <p:cNvSpPr txBox="1"/>
-          <p:nvPr/>
-        </p:nvSpPr>
-        <p:spPr>
-          <a:xfrm>
             <a:off x="11094415" y="6446520"/>
             <a:ext cx="548640" cy="274320"/>
           </a:xfrm>
@@ -10557,41 +10067,6 @@
         </p:nvSpPr>
         <p:spPr>
           <a:xfrm>
-            <a:off x="2194560" y="6446520"/>
-            <a:ext cx="5943600" cy="274320"/>
-          </a:xfrm>
-          <a:prstGeom prst="rect">
-            <a:avLst/>
-          </a:prstGeom>
-          <a:noFill/>
-        </p:spPr>
-        <p:txBody>
-          <a:bodyPr wrap="square" anchor="t" lIns="0" rIns="0" tIns="0" bIns="0">
-            <a:spAutoFit/>
-          </a:bodyPr>
-          <a:lstStyle/>
-          <a:p>
-            <a:pPr algn="l"/>
-            <a:r>
-              <a:rPr sz="1000" b="1" i="0">
-                <a:solidFill>
-                  <a:srgbClr val="8F989D"/>
-                </a:solidFill>
-                <a:latin typeface="Calibri"/>
-              </a:rPr>
-              <a:t>Inicio 5:10 pm</a:t>
-            </a:r>
-          </a:p>
-        </p:txBody>
-      </p:sp>
-      <p:sp>
-        <p:nvSpPr>
-          <p:cNvPr id="6" name="TextBox 5"/>
-          <p:cNvSpPr txBox="1"/>
-          <p:nvPr/>
-        </p:nvSpPr>
-        <p:spPr>
-          <a:xfrm>
             <a:off x="11094415" y="6446520"/>
             <a:ext cx="548640" cy="274320"/>
           </a:xfrm>
@@ -11050,7 +10525,7 @@
                 </a:solidFill>
                 <a:latin typeface="Calibri"/>
               </a:rPr>
-              <a:t> y la </a:t>
+              <a:t> y, </a:t>
             </a:r>
             <a:r>
               <a:rPr sz="1500" b="1" i="0">
@@ -11059,7 +10534,7 @@
                 </a:solidFill>
                 <a:latin typeface="Calibri"/>
               </a:rPr>
-              <a:t>constancia de antiplagio</a:t>
+              <a:t>si el curso lo exige</a:t>
             </a:r>
             <a:r>
               <a:rPr sz="1500" b="0" i="0">
@@ -11068,7 +10543,7 @@
                 </a:solidFill>
                 <a:latin typeface="Calibri"/>
               </a:rPr>
-              <a:t>.</a:t>
+              <a:t>, el informe de similitud que le haya indicado el Docente.</a:t>
             </a:r>
           </a:p>
         </p:txBody>
@@ -11076,41 +10551,6 @@
       <p:sp>
         <p:nvSpPr>
           <p:cNvPr id="5" name="TextBox 4"/>
-          <p:cNvSpPr txBox="1"/>
-          <p:nvPr/>
-        </p:nvSpPr>
-        <p:spPr>
-          <a:xfrm>
-            <a:off x="2194560" y="6446520"/>
-            <a:ext cx="5943600" cy="274320"/>
-          </a:xfrm>
-          <a:prstGeom prst="rect">
-            <a:avLst/>
-          </a:prstGeom>
-          <a:noFill/>
-        </p:spPr>
-        <p:txBody>
-          <a:bodyPr wrap="square" anchor="t" lIns="0" rIns="0" tIns="0" bIns="0">
-            <a:spAutoFit/>
-          </a:bodyPr>
-          <a:lstStyle/>
-          <a:p>
-            <a:pPr algn="l"/>
-            <a:r>
-              <a:rPr sz="1000" b="1" i="0">
-                <a:solidFill>
-                  <a:srgbClr val="8F989D"/>
-                </a:solidFill>
-                <a:latin typeface="Calibri"/>
-              </a:rPr>
-              <a:t>Inicio 5:10 pm</a:t>
-            </a:r>
-          </a:p>
-        </p:txBody>
-      </p:sp>
-      <p:sp>
-        <p:nvSpPr>
-          <p:cNvPr id="6" name="TextBox 5"/>
           <p:cNvSpPr txBox="1"/>
           <p:nvPr/>
         </p:nvSpPr>
@@ -11362,41 +10802,6 @@
           </a:p>
         </p:txBody>
       </p:sp>
-      <p:sp>
-        <p:nvSpPr>
-          <p:cNvPr id="7" name="TextBox 6"/>
-          <p:cNvSpPr txBox="1"/>
-          <p:nvPr/>
-        </p:nvSpPr>
-        <p:spPr>
-          <a:xfrm>
-            <a:off x="2194560" y="6446520"/>
-            <a:ext cx="5943600" cy="274320"/>
-          </a:xfrm>
-          <a:prstGeom prst="rect">
-            <a:avLst/>
-          </a:prstGeom>
-          <a:noFill/>
-        </p:spPr>
-        <p:txBody>
-          <a:bodyPr wrap="square" anchor="t" lIns="0" rIns="0" tIns="0" bIns="0">
-            <a:spAutoFit/>
-          </a:bodyPr>
-          <a:lstStyle/>
-          <a:p>
-            <a:pPr algn="l"/>
-            <a:r>
-              <a:rPr sz="1000" b="1" i="0">
-                <a:solidFill>
-                  <a:srgbClr val="8F989D"/>
-                </a:solidFill>
-                <a:latin typeface="Calibri"/>
-              </a:rPr>
-              <a:t>Inicio 5:10 pm</a:t>
-            </a:r>
-          </a:p>
-        </p:txBody>
-      </p:sp>
     </p:spTree>
   </p:cSld>
   <p:clrMapOvr>
@@ -11785,41 +11190,6 @@
         </p:nvSpPr>
         <p:spPr>
           <a:xfrm>
-            <a:off x="2194560" y="6446520"/>
-            <a:ext cx="5943600" cy="274320"/>
-          </a:xfrm>
-          <a:prstGeom prst="rect">
-            <a:avLst/>
-          </a:prstGeom>
-          <a:noFill/>
-        </p:spPr>
-        <p:txBody>
-          <a:bodyPr wrap="square" anchor="t" lIns="0" rIns="0" tIns="0" bIns="0">
-            <a:spAutoFit/>
-          </a:bodyPr>
-          <a:lstStyle/>
-          <a:p>
-            <a:pPr algn="l"/>
-            <a:r>
-              <a:rPr sz="1000" b="1" i="0">
-                <a:solidFill>
-                  <a:srgbClr val="8F989D"/>
-                </a:solidFill>
-                <a:latin typeface="Calibri"/>
-              </a:rPr>
-              <a:t>Inicio 5:10 pm</a:t>
-            </a:r>
-          </a:p>
-        </p:txBody>
-      </p:sp>
-      <p:sp>
-        <p:nvSpPr>
-          <p:cNvPr id="6" name="TextBox 5"/>
-          <p:cNvSpPr txBox="1"/>
-          <p:nvPr/>
-        </p:nvSpPr>
-        <p:spPr>
-          <a:xfrm>
             <a:off x="11094415" y="6446520"/>
             <a:ext cx="548640" cy="274320"/>
           </a:xfrm>
@@ -12012,41 +11382,6 @@
       <p:sp>
         <p:nvSpPr>
           <p:cNvPr id="5" name="TextBox 4"/>
-          <p:cNvSpPr txBox="1"/>
-          <p:nvPr/>
-        </p:nvSpPr>
-        <p:spPr>
-          <a:xfrm>
-            <a:off x="2194560" y="6446520"/>
-            <a:ext cx="5943600" cy="274320"/>
-          </a:xfrm>
-          <a:prstGeom prst="rect">
-            <a:avLst/>
-          </a:prstGeom>
-          <a:noFill/>
-        </p:spPr>
-        <p:txBody>
-          <a:bodyPr wrap="square" anchor="t" lIns="0" rIns="0" tIns="0" bIns="0">
-            <a:spAutoFit/>
-          </a:bodyPr>
-          <a:lstStyle/>
-          <a:p>
-            <a:pPr algn="l"/>
-            <a:r>
-              <a:rPr sz="1000" b="1" i="0">
-                <a:solidFill>
-                  <a:srgbClr val="8F989D"/>
-                </a:solidFill>
-                <a:latin typeface="Calibri"/>
-              </a:rPr>
-              <a:t>Inicio 5:10 pm</a:t>
-            </a:r>
-          </a:p>
-        </p:txBody>
-      </p:sp>
-      <p:sp>
-        <p:nvSpPr>
-          <p:cNvPr id="6" name="TextBox 5"/>
           <p:cNvSpPr txBox="1"/>
           <p:nvPr/>
         </p:nvSpPr>
@@ -12822,41 +12157,6 @@
         </p:nvSpPr>
         <p:spPr>
           <a:xfrm>
-            <a:off x="2194560" y="6446520"/>
-            <a:ext cx="5943600" cy="274320"/>
-          </a:xfrm>
-          <a:prstGeom prst="rect">
-            <a:avLst/>
-          </a:prstGeom>
-          <a:noFill/>
-        </p:spPr>
-        <p:txBody>
-          <a:bodyPr wrap="square" anchor="t" lIns="0" rIns="0" tIns="0" bIns="0">
-            <a:spAutoFit/>
-          </a:bodyPr>
-          <a:lstStyle/>
-          <a:p>
-            <a:pPr algn="l"/>
-            <a:r>
-              <a:rPr sz="1000" b="1" i="0">
-                <a:solidFill>
-                  <a:srgbClr val="8F989D"/>
-                </a:solidFill>
-                <a:latin typeface="Calibri"/>
-              </a:rPr>
-              <a:t>Inicio 5:10 pm</a:t>
-            </a:r>
-          </a:p>
-        </p:txBody>
-      </p:sp>
-      <p:sp>
-        <p:nvSpPr>
-          <p:cNvPr id="7" name="TextBox 6"/>
-          <p:cNvSpPr txBox="1"/>
-          <p:nvPr/>
-        </p:nvSpPr>
-        <p:spPr>
-          <a:xfrm>
             <a:off x="11094415" y="6446520"/>
             <a:ext cx="548640" cy="274320"/>
           </a:xfrm>
@@ -13254,41 +12554,6 @@
         </p:nvSpPr>
         <p:spPr>
           <a:xfrm>
-            <a:off x="2194560" y="6446520"/>
-            <a:ext cx="5943600" cy="274320"/>
-          </a:xfrm>
-          <a:prstGeom prst="rect">
-            <a:avLst/>
-          </a:prstGeom>
-          <a:noFill/>
-        </p:spPr>
-        <p:txBody>
-          <a:bodyPr wrap="square" anchor="t" lIns="0" rIns="0" tIns="0" bIns="0">
-            <a:spAutoFit/>
-          </a:bodyPr>
-          <a:lstStyle/>
-          <a:p>
-            <a:pPr algn="l"/>
-            <a:r>
-              <a:rPr sz="1000" b="1" i="0">
-                <a:solidFill>
-                  <a:srgbClr val="8F989D"/>
-                </a:solidFill>
-                <a:latin typeface="Calibri"/>
-              </a:rPr>
-              <a:t>Inicio 5:10 pm</a:t>
-            </a:r>
-          </a:p>
-        </p:txBody>
-      </p:sp>
-      <p:sp>
-        <p:nvSpPr>
-          <p:cNvPr id="6" name="TextBox 5"/>
-          <p:cNvSpPr txBox="1"/>
-          <p:nvPr/>
-        </p:nvSpPr>
-        <p:spPr>
-          <a:xfrm>
             <a:off x="11094415" y="6446520"/>
             <a:ext cx="548640" cy="274320"/>
           </a:xfrm>
@@ -13486,41 +12751,6 @@
         </p:nvSpPr>
         <p:spPr>
           <a:xfrm>
-            <a:off x="2194560" y="6446520"/>
-            <a:ext cx="5943600" cy="274320"/>
-          </a:xfrm>
-          <a:prstGeom prst="rect">
-            <a:avLst/>
-          </a:prstGeom>
-          <a:noFill/>
-        </p:spPr>
-        <p:txBody>
-          <a:bodyPr wrap="square" anchor="t" lIns="0" rIns="0" tIns="0" bIns="0">
-            <a:spAutoFit/>
-          </a:bodyPr>
-          <a:lstStyle/>
-          <a:p>
-            <a:pPr algn="l"/>
-            <a:r>
-              <a:rPr sz="1000" b="1" i="0">
-                <a:solidFill>
-                  <a:srgbClr val="8F989D"/>
-                </a:solidFill>
-                <a:latin typeface="Calibri"/>
-              </a:rPr>
-              <a:t>Inicio 5:10 pm</a:t>
-            </a:r>
-          </a:p>
-        </p:txBody>
-      </p:sp>
-      <p:sp>
-        <p:nvSpPr>
-          <p:cNvPr id="6" name="TextBox 5"/>
-          <p:cNvSpPr txBox="1"/>
-          <p:nvPr/>
-        </p:nvSpPr>
-        <p:spPr>
-          <a:xfrm>
             <a:off x="11094415" y="6446520"/>
             <a:ext cx="548640" cy="274320"/>
           </a:xfrm>
@@ -13899,41 +13129,6 @@
         </p:nvSpPr>
         <p:spPr>
           <a:xfrm>
-            <a:off x="2194560" y="6446520"/>
-            <a:ext cx="5943600" cy="274320"/>
-          </a:xfrm>
-          <a:prstGeom prst="rect">
-            <a:avLst/>
-          </a:prstGeom>
-          <a:noFill/>
-        </p:spPr>
-        <p:txBody>
-          <a:bodyPr wrap="square" anchor="t" lIns="0" rIns="0" tIns="0" bIns="0">
-            <a:spAutoFit/>
-          </a:bodyPr>
-          <a:lstStyle/>
-          <a:p>
-            <a:pPr algn="l"/>
-            <a:r>
-              <a:rPr sz="1000" b="1" i="0">
-                <a:solidFill>
-                  <a:srgbClr val="8F989D"/>
-                </a:solidFill>
-                <a:latin typeface="Calibri"/>
-              </a:rPr>
-              <a:t>Inicio 5:10 pm</a:t>
-            </a:r>
-          </a:p>
-        </p:txBody>
-      </p:sp>
-      <p:sp>
-        <p:nvSpPr>
-          <p:cNvPr id="6" name="TextBox 5"/>
-          <p:cNvSpPr txBox="1"/>
-          <p:nvPr/>
-        </p:nvSpPr>
-        <p:spPr>
-          <a:xfrm>
             <a:off x="11094415" y="6446520"/>
             <a:ext cx="548640" cy="274320"/>
           </a:xfrm>
@@ -14262,41 +13457,6 @@
       <p:sp>
         <p:nvSpPr>
           <p:cNvPr id="5" name="TextBox 4"/>
-          <p:cNvSpPr txBox="1"/>
-          <p:nvPr/>
-        </p:nvSpPr>
-        <p:spPr>
-          <a:xfrm>
-            <a:off x="2194560" y="6446520"/>
-            <a:ext cx="5943600" cy="274320"/>
-          </a:xfrm>
-          <a:prstGeom prst="rect">
-            <a:avLst/>
-          </a:prstGeom>
-          <a:noFill/>
-        </p:spPr>
-        <p:txBody>
-          <a:bodyPr wrap="square" anchor="t" lIns="0" rIns="0" tIns="0" bIns="0">
-            <a:spAutoFit/>
-          </a:bodyPr>
-          <a:lstStyle/>
-          <a:p>
-            <a:pPr algn="l"/>
-            <a:r>
-              <a:rPr sz="1000" b="1" i="0">
-                <a:solidFill>
-                  <a:srgbClr val="8F989D"/>
-                </a:solidFill>
-                <a:latin typeface="Calibri"/>
-              </a:rPr>
-              <a:t>Inicio 5:10 pm</a:t>
-            </a:r>
-          </a:p>
-        </p:txBody>
-      </p:sp>
-      <p:sp>
-        <p:nvSpPr>
-          <p:cNvPr id="6" name="TextBox 5"/>
           <p:cNvSpPr txBox="1"/>
           <p:nvPr/>
         </p:nvSpPr>

--- a/Pregrado/Trabajo de grado 3/Clases/Sesion 12 - Sustentación ante jurados/Presentacion.pptx
+++ b/Pregrado/Trabajo de grado 3/Clases/Sesion 12 - Sustentación ante jurados/Presentacion.pptx
@@ -29,6 +29,7 @@
     <p:sldId id="277" r:id="rId28"/>
     <p:sldId id="278" r:id="rId29"/>
     <p:sldId id="279" r:id="rId30"/>
+    <p:sldId id="280" r:id="rId31"/>
   </p:sldIdLst>
   <p:sldSz cx="12191695" cy="6858000" type="screen4x3"/>
   <p:notesSz cx="6858000" cy="9144000"/>
@@ -6290,7 +6291,7 @@
                 </a:solidFill>
                 <a:latin typeface="Calibri"/>
               </a:rPr>
-              <a:t>"Meto todo el artículo en las diapositivas para no dejar nada por fuera."</a:t>
+              <a:t>"Meto todo el documento en las diapositivas para no dejar nada por fuera."</a:t>
             </a:r>
           </a:p>
         </p:txBody>
@@ -7441,7 +7442,7 @@
                 </a:solidFill>
                 <a:latin typeface="Calibri"/>
               </a:rPr>
-              <a:t>TALLER — Guion oral y preguntas anticipadas (20 minutos, en parejas)</a:t>
+              <a:t>TALLER · Guion oral y preguntas anticipadas</a:t>
             </a:r>
           </a:p>
         </p:txBody>
@@ -7454,8 +7455,8 @@
         </p:nvSpPr>
         <p:spPr>
           <a:xfrm>
-            <a:off x="640080" y="1691639"/>
-            <a:ext cx="10911535" cy="4617720"/>
+            <a:off x="640080" y="1280160"/>
+            <a:ext cx="10911535" cy="411480"/>
           </a:xfrm>
           <a:prstGeom prst="rect">
             <a:avLst/>
@@ -7468,6 +7469,41 @@
           </a:bodyPr>
           <a:lstStyle/>
           <a:p>
+            <a:pPr algn="ctr"/>
+            <a:r>
+              <a:rPr sz="1500" b="0" i="0">
+                <a:solidFill>
+                  <a:srgbClr val="2B2B2B"/>
+                </a:solidFill>
+                <a:latin typeface="Calibri"/>
+              </a:rPr>
+              <a:t>En parejas: uno sustenta con cronómetro y el otro toma notas de tiempo y claridad; al terminar, cambian</a:t>
+            </a:r>
+          </a:p>
+        </p:txBody>
+      </p:sp>
+      <p:sp>
+        <p:nvSpPr>
+          <p:cNvPr id="5" name="TextBox 4"/>
+          <p:cNvSpPr txBox="1"/>
+          <p:nvPr/>
+        </p:nvSpPr>
+        <p:spPr>
+          <a:xfrm>
+            <a:off x="640080" y="2011679"/>
+            <a:ext cx="10911535" cy="4297680"/>
+          </a:xfrm>
+          <a:prstGeom prst="rect">
+            <a:avLst/>
+          </a:prstGeom>
+          <a:noFill/>
+        </p:spPr>
+        <p:txBody>
+          <a:bodyPr wrap="square" anchor="t" lIns="0" rIns="0" tIns="0" bIns="0">
+            <a:spAutoFit/>
+          </a:bodyPr>
+          <a:lstStyle/>
+          <a:p>
             <a:pPr>
               <a:spcAft>
                 <a:spcPts val="1000"/>
@@ -7489,242 +7525,16 @@
                 </a:solidFill>
                 <a:latin typeface="Calibri"/>
               </a:rPr>
-              <a:t>Consigna literal.</a:t>
-            </a:r>
-            <a:r>
-              <a:rPr sz="1600" b="0" i="0">
-                <a:solidFill>
-                  <a:srgbClr val="2B2B2B"/>
-                </a:solidFill>
-                <a:latin typeface="Calibri"/>
-              </a:rPr>
-              <a:t> Trabajen en parejas y entregue </a:t>
-            </a:r>
-            <a:r>
-              <a:rPr sz="1600" b="1" i="0">
-                <a:solidFill>
-                  <a:srgbClr val="2B2B2B"/>
-                </a:solidFill>
-                <a:latin typeface="Calibri"/>
-              </a:rPr>
-              <a:t>S12_GuionSustentacion_Apellido</a:t>
-            </a:r>
-            <a:r>
-              <a:rPr sz="1600" b="0" i="0">
-                <a:solidFill>
-                  <a:srgbClr val="2B2B2B"/>
-                </a:solidFill>
-                <a:latin typeface="Calibri"/>
-              </a:rPr>
-              <a:t> con:</a:t>
-            </a:r>
-          </a:p>
-          <a:p>
-            <a:pPr lvl="1">
-              <a:spcAft>
-                <a:spcPts val="600"/>
-              </a:spcAft>
-            </a:pPr>
-            <a:r>
-              <a:rPr sz="1500" b="0" i="0">
-                <a:solidFill>
-                  <a:srgbClr val="2B2B2B"/>
-                </a:solidFill>
-                <a:latin typeface="Calibri"/>
-              </a:rPr>
-              <a:t>●   </a:t>
-            </a:r>
-            <a:r>
-              <a:rPr sz="1500" b="1" i="0">
-                <a:solidFill>
-                  <a:srgbClr val="2B2B2B"/>
-                </a:solidFill>
-                <a:latin typeface="Calibri"/>
-              </a:rPr>
-              <a:t>(1) El guion oral por bloques</a:t>
-            </a:r>
-            <a:r>
-              <a:rPr sz="1500" b="0" i="0">
-                <a:solidFill>
-                  <a:srgbClr val="2B2B2B"/>
-                </a:solidFill>
-                <a:latin typeface="Calibri"/>
-              </a:rPr>
-              <a:t>, con los </a:t>
-            </a:r>
-            <a:r>
-              <a:rPr sz="1500" b="1" i="0">
-                <a:solidFill>
-                  <a:srgbClr val="2B2B2B"/>
-                </a:solidFill>
-                <a:latin typeface="Calibri"/>
-              </a:rPr>
-              <a:t>minutos asignados</a:t>
-            </a:r>
-            <a:r>
-              <a:rPr sz="1500" b="0" i="0">
-                <a:solidFill>
-                  <a:srgbClr val="2B2B2B"/>
-                </a:solidFill>
-                <a:latin typeface="Calibri"/>
-              </a:rPr>
-              <a:t> a cada uno y el tiempo real que le tomó en el ensayo.</a:t>
-            </a:r>
-          </a:p>
-          <a:p>
-            <a:pPr lvl="1">
-              <a:spcAft>
-                <a:spcPts val="600"/>
-              </a:spcAft>
-            </a:pPr>
-            <a:r>
-              <a:rPr sz="1500" b="0" i="0">
-                <a:solidFill>
-                  <a:srgbClr val="2B2B2B"/>
-                </a:solidFill>
-                <a:latin typeface="Calibri"/>
-              </a:rPr>
-              <a:t>●   </a:t>
-            </a:r>
-            <a:r>
-              <a:rPr sz="1500" b="1" i="0">
-                <a:solidFill>
-                  <a:srgbClr val="2B2B2B"/>
-                </a:solidFill>
-                <a:latin typeface="Calibri"/>
-              </a:rPr>
-              <a:t>(2) Cinco preguntas difíciles</a:t>
-            </a:r>
-            <a:r>
-              <a:rPr sz="1500" b="0" i="0">
-                <a:solidFill>
-                  <a:srgbClr val="2B2B2B"/>
-                </a:solidFill>
-                <a:latin typeface="Calibri"/>
-              </a:rPr>
-              <a:t> que anticipa del jurado, </a:t>
-            </a:r>
-            <a:r>
-              <a:rPr sz="1500" b="1" i="0">
-                <a:solidFill>
-                  <a:srgbClr val="2B2B2B"/>
-                </a:solidFill>
-                <a:latin typeface="Calibri"/>
-              </a:rPr>
-              <a:t>cada una con su respuesta corta</a:t>
-            </a:r>
-            <a:r>
-              <a:rPr sz="1500" b="0" i="0">
-                <a:solidFill>
-                  <a:srgbClr val="2B2B2B"/>
-                </a:solidFill>
-                <a:latin typeface="Calibri"/>
-              </a:rPr>
-              <a:t> (máximo cuatro líneas).</a:t>
-            </a:r>
-          </a:p>
-          <a:p>
-            <a:pPr lvl="1">
-              <a:spcAft>
-                <a:spcPts val="600"/>
-              </a:spcAft>
-            </a:pPr>
-            <a:r>
-              <a:rPr sz="1500" b="0" i="0">
-                <a:solidFill>
-                  <a:srgbClr val="2B2B2B"/>
-                </a:solidFill>
-                <a:latin typeface="Calibri"/>
-              </a:rPr>
-              <a:t>●   </a:t>
-            </a:r>
-            <a:r>
-              <a:rPr sz="1500" b="1" i="0">
-                <a:solidFill>
-                  <a:srgbClr val="2B2B2B"/>
-                </a:solidFill>
-                <a:latin typeface="Calibri"/>
-              </a:rPr>
-              <a:t>(3)</a:t>
-            </a:r>
-            <a:r>
-              <a:rPr sz="1500" b="0" i="0">
-                <a:solidFill>
-                  <a:srgbClr val="2B2B2B"/>
-                </a:solidFill>
-                <a:latin typeface="Calibri"/>
-              </a:rPr>
-              <a:t> Al menos </a:t>
-            </a:r>
-            <a:r>
-              <a:rPr sz="1500" b="1" i="0">
-                <a:solidFill>
-                  <a:srgbClr val="2B2B2B"/>
-                </a:solidFill>
-                <a:latin typeface="Calibri"/>
-              </a:rPr>
-              <a:t>una</a:t>
-            </a:r>
-            <a:r>
-              <a:rPr sz="1500" b="0" i="0">
-                <a:solidFill>
-                  <a:srgbClr val="2B2B2B"/>
-                </a:solidFill>
-                <a:latin typeface="Calibri"/>
-              </a:rPr>
-              <a:t> de las cinco debe ser una pregunta que usted </a:t>
-            </a:r>
-            <a:r>
-              <a:rPr sz="1500" b="1" i="0">
-                <a:solidFill>
-                  <a:srgbClr val="2B2B2B"/>
-                </a:solidFill>
-                <a:latin typeface="Calibri"/>
-              </a:rPr>
-              <a:t>no sabe responder</a:t>
-            </a:r>
-            <a:r>
-              <a:rPr sz="1500" b="0" i="0">
-                <a:solidFill>
-                  <a:srgbClr val="2B2B2B"/>
-                </a:solidFill>
-                <a:latin typeface="Calibri"/>
-              </a:rPr>
-              <a:t>, resuelta con la fórmula de tres partes.</a:t>
-            </a:r>
-          </a:p>
-          <a:p>
-            <a:pPr lvl="1">
-              <a:spcAft>
-                <a:spcPts val="600"/>
-              </a:spcAft>
-            </a:pPr>
-            <a:r>
-              <a:rPr sz="1500" b="0" i="0">
-                <a:solidFill>
-                  <a:srgbClr val="2B2B2B"/>
-                </a:solidFill>
-                <a:latin typeface="Calibri"/>
-              </a:rPr>
-              <a:t>●   </a:t>
-            </a:r>
-            <a:r>
-              <a:rPr sz="1500" b="1" i="0">
-                <a:solidFill>
-                  <a:srgbClr val="2B2B2B"/>
-                </a:solidFill>
-                <a:latin typeface="Calibri"/>
-              </a:rPr>
-              <a:t>(4) Las tres correcciones</a:t>
-            </a:r>
-            <a:r>
-              <a:rPr sz="1500" b="0" i="0">
-                <a:solidFill>
-                  <a:srgbClr val="2B2B2B"/>
-                </a:solidFill>
-                <a:latin typeface="Calibri"/>
-              </a:rPr>
-              <a:t> que su pareja le señaló y qué hizo con cada una.</a:t>
+              <a:t>Al final tiene:</a:t>
+            </a:r>
+            <a:r>
+              <a:rPr sz="1600" b="0" i="0">
+                <a:solidFill>
+                  <a:srgbClr val="2B2B2B"/>
+                </a:solidFill>
+                <a:latin typeface="Calibri"/>
+              </a:rPr>
+              <a:t> el guion oral cronometrado, cinco preguntas difíciles con respuesta y las tres correcciones de su pareja.</a:t>
             </a:r>
           </a:p>
           <a:p>
@@ -7749,23 +7559,303 @@
                 </a:solidFill>
                 <a:latin typeface="Calibri"/>
               </a:rPr>
-              <a:t>Dinámica:</a:t>
-            </a:r>
-            <a:r>
-              <a:rPr sz="1600" b="0" i="0">
-                <a:solidFill>
-                  <a:srgbClr val="2B2B2B"/>
-                </a:solidFill>
-                <a:latin typeface="Calibri"/>
-              </a:rPr>
-              <a:t> uno sustenta con cronómetro mientras el otro toma notas de tiempo y claridad; a los 10 minutos, cambian.</a:t>
-            </a:r>
-          </a:p>
-        </p:txBody>
-      </p:sp>
-      <p:sp>
-        <p:nvSpPr>
-          <p:cNvPr id="5" name="TextBox 4"/>
+              <a:t>Paso 1</a:t>
+            </a:r>
+            <a:r>
+              <a:rPr sz="1600" b="0" i="0">
+                <a:solidFill>
+                  <a:srgbClr val="2B2B2B"/>
+                </a:solidFill>
+                <a:latin typeface="Calibri"/>
+              </a:rPr>
+              <a:t> · </a:t>
+            </a:r>
+            <a:r>
+              <a:rPr sz="1600" b="1" i="0">
+                <a:solidFill>
+                  <a:srgbClr val="2B2B2B"/>
+                </a:solidFill>
+                <a:latin typeface="Calibri"/>
+              </a:rPr>
+              <a:t>El guion oral por bloques</a:t>
+            </a:r>
+            <a:r>
+              <a:rPr sz="1600" b="0" i="0">
+                <a:solidFill>
+                  <a:srgbClr val="2B2B2B"/>
+                </a:solidFill>
+                <a:latin typeface="Calibri"/>
+              </a:rPr>
+              <a:t>, con los </a:t>
+            </a:r>
+            <a:r>
+              <a:rPr sz="1600" b="1" i="0">
+                <a:solidFill>
+                  <a:srgbClr val="2B2B2B"/>
+                </a:solidFill>
+                <a:latin typeface="Calibri"/>
+              </a:rPr>
+              <a:t>minutos asignados</a:t>
+            </a:r>
+            <a:r>
+              <a:rPr sz="1600" b="0" i="0">
+                <a:solidFill>
+                  <a:srgbClr val="2B2B2B"/>
+                </a:solidFill>
+                <a:latin typeface="Calibri"/>
+              </a:rPr>
+              <a:t> a cada uno y el tiempo real que le tomó en el ensayo.</a:t>
+            </a:r>
+          </a:p>
+          <a:p>
+            <a:pPr>
+              <a:spcAft>
+                <a:spcPts val="1000"/>
+              </a:spcAft>
+            </a:pPr>
+            <a:r>
+              <a:rPr sz="1600" b="0" i="0">
+                <a:solidFill>
+                  <a:srgbClr val="2B2B2B"/>
+                </a:solidFill>
+                <a:latin typeface="Calibri"/>
+              </a:rPr>
+              <a:t>–   </a:t>
+            </a:r>
+            <a:r>
+              <a:rPr sz="1600" b="1" i="0">
+                <a:solidFill>
+                  <a:srgbClr val="2B2B2B"/>
+                </a:solidFill>
+                <a:latin typeface="Calibri"/>
+              </a:rPr>
+              <a:t>Paso 2</a:t>
+            </a:r>
+            <a:r>
+              <a:rPr sz="1600" b="0" i="0">
+                <a:solidFill>
+                  <a:srgbClr val="2B2B2B"/>
+                </a:solidFill>
+                <a:latin typeface="Calibri"/>
+              </a:rPr>
+              <a:t> · </a:t>
+            </a:r>
+            <a:r>
+              <a:rPr sz="1600" b="1" i="0">
+                <a:solidFill>
+                  <a:srgbClr val="2B2B2B"/>
+                </a:solidFill>
+                <a:latin typeface="Calibri"/>
+              </a:rPr>
+              <a:t>Cinco preguntas difíciles</a:t>
+            </a:r>
+            <a:r>
+              <a:rPr sz="1600" b="0" i="0">
+                <a:solidFill>
+                  <a:srgbClr val="2B2B2B"/>
+                </a:solidFill>
+                <a:latin typeface="Calibri"/>
+              </a:rPr>
+              <a:t> que anticipa del jurado, </a:t>
+            </a:r>
+            <a:r>
+              <a:rPr sz="1600" b="1" i="0">
+                <a:solidFill>
+                  <a:srgbClr val="2B2B2B"/>
+                </a:solidFill>
+                <a:latin typeface="Calibri"/>
+              </a:rPr>
+              <a:t>cada una con su respuesta corta</a:t>
+            </a:r>
+            <a:r>
+              <a:rPr sz="1600" b="0" i="0">
+                <a:solidFill>
+                  <a:srgbClr val="2B2B2B"/>
+                </a:solidFill>
+                <a:latin typeface="Calibri"/>
+              </a:rPr>
+              <a:t> de máximo cuatro líneas.</a:t>
+            </a:r>
+          </a:p>
+          <a:p>
+            <a:pPr>
+              <a:spcAft>
+                <a:spcPts val="1000"/>
+              </a:spcAft>
+            </a:pPr>
+            <a:r>
+              <a:rPr sz="1600" b="0" i="0">
+                <a:solidFill>
+                  <a:srgbClr val="2B2B2B"/>
+                </a:solidFill>
+                <a:latin typeface="Calibri"/>
+              </a:rPr>
+              <a:t>–   </a:t>
+            </a:r>
+            <a:r>
+              <a:rPr sz="1600" b="1" i="0">
+                <a:solidFill>
+                  <a:srgbClr val="2B2B2B"/>
+                </a:solidFill>
+                <a:latin typeface="Calibri"/>
+              </a:rPr>
+              <a:t>Paso 3</a:t>
+            </a:r>
+            <a:r>
+              <a:rPr sz="1600" b="0" i="0">
+                <a:solidFill>
+                  <a:srgbClr val="2B2B2B"/>
+                </a:solidFill>
+                <a:latin typeface="Calibri"/>
+              </a:rPr>
+              <a:t> · Al menos </a:t>
+            </a:r>
+            <a:r>
+              <a:rPr sz="1600" b="1" i="0">
+                <a:solidFill>
+                  <a:srgbClr val="2B2B2B"/>
+                </a:solidFill>
+                <a:latin typeface="Calibri"/>
+              </a:rPr>
+              <a:t>una</a:t>
+            </a:r>
+            <a:r>
+              <a:rPr sz="1600" b="0" i="0">
+                <a:solidFill>
+                  <a:srgbClr val="2B2B2B"/>
+                </a:solidFill>
+                <a:latin typeface="Calibri"/>
+              </a:rPr>
+              <a:t> de las cinco debe ser una pregunta que usted </a:t>
+            </a:r>
+            <a:r>
+              <a:rPr sz="1600" b="1" i="0">
+                <a:solidFill>
+                  <a:srgbClr val="2B2B2B"/>
+                </a:solidFill>
+                <a:latin typeface="Calibri"/>
+              </a:rPr>
+              <a:t>no sabe responder</a:t>
+            </a:r>
+            <a:r>
+              <a:rPr sz="1600" b="0" i="0">
+                <a:solidFill>
+                  <a:srgbClr val="2B2B2B"/>
+                </a:solidFill>
+                <a:latin typeface="Calibri"/>
+              </a:rPr>
+              <a:t>, resuelta con la fórmula de tres partes.</a:t>
+            </a:r>
+          </a:p>
+          <a:p>
+            <a:pPr>
+              <a:spcAft>
+                <a:spcPts val="1000"/>
+              </a:spcAft>
+            </a:pPr>
+            <a:r>
+              <a:rPr sz="1600" b="0" i="0">
+                <a:solidFill>
+                  <a:srgbClr val="2B2B2B"/>
+                </a:solidFill>
+                <a:latin typeface="Calibri"/>
+              </a:rPr>
+              <a:t>–   </a:t>
+            </a:r>
+            <a:r>
+              <a:rPr sz="1600" b="1" i="0">
+                <a:solidFill>
+                  <a:srgbClr val="2B2B2B"/>
+                </a:solidFill>
+                <a:latin typeface="Calibri"/>
+              </a:rPr>
+              <a:t>Paso 4</a:t>
+            </a:r>
+            <a:r>
+              <a:rPr sz="1600" b="0" i="0">
+                <a:solidFill>
+                  <a:srgbClr val="2B2B2B"/>
+                </a:solidFill>
+                <a:latin typeface="Calibri"/>
+              </a:rPr>
+              <a:t> · </a:t>
+            </a:r>
+            <a:r>
+              <a:rPr sz="1600" b="1" i="0">
+                <a:solidFill>
+                  <a:srgbClr val="2B2B2B"/>
+                </a:solidFill>
+                <a:latin typeface="Calibri"/>
+              </a:rPr>
+              <a:t>Las tres correcciones</a:t>
+            </a:r>
+            <a:r>
+              <a:rPr sz="1600" b="0" i="0">
+                <a:solidFill>
+                  <a:srgbClr val="2B2B2B"/>
+                </a:solidFill>
+                <a:latin typeface="Calibri"/>
+              </a:rPr>
+              <a:t> que su pareja le señaló y qué hizo con cada una.</a:t>
+            </a:r>
+          </a:p>
+          <a:p>
+            <a:pPr>
+              <a:spcAft>
+                <a:spcPts val="1000"/>
+              </a:spcAft>
+            </a:pPr>
+            <a:r>
+              <a:rPr sz="1600" b="0" i="0">
+                <a:solidFill>
+                  <a:srgbClr val="2B2B2B"/>
+                </a:solidFill>
+                <a:latin typeface="Calibri"/>
+              </a:rPr>
+              <a:t>–   </a:t>
+            </a:r>
+            <a:r>
+              <a:rPr sz="1600" b="1" i="0">
+                <a:solidFill>
+                  <a:srgbClr val="2B2B2B"/>
+                </a:solidFill>
+                <a:latin typeface="Calibri"/>
+              </a:rPr>
+              <a:t>En clase, sin falta:</a:t>
+            </a:r>
+            <a:r>
+              <a:rPr sz="1600" b="0" i="0">
+                <a:solidFill>
+                  <a:srgbClr val="2B2B2B"/>
+                </a:solidFill>
+                <a:latin typeface="Calibri"/>
+              </a:rPr>
+              <a:t> los </a:t>
+            </a:r>
+            <a:r>
+              <a:rPr sz="1600" b="1" i="0">
+                <a:solidFill>
+                  <a:srgbClr val="2B2B2B"/>
+                </a:solidFill>
+                <a:latin typeface="Calibri"/>
+              </a:rPr>
+              <a:t>pasos 1 a 2</a:t>
+            </a:r>
+            <a:r>
+              <a:rPr sz="1600" b="0" i="0">
+                <a:solidFill>
+                  <a:srgbClr val="2B2B2B"/>
+                </a:solidFill>
+                <a:latin typeface="Calibri"/>
+              </a:rPr>
+              <a:t>. Del 3 en adelante puede quedar en trabajo autónomo, pero antes de la próxima sesión.</a:t>
+            </a:r>
+          </a:p>
+        </p:txBody>
+      </p:sp>
+      <p:sp>
+        <p:nvSpPr>
+          <p:cNvPr id="6" name="TextBox 5"/>
           <p:cNvSpPr txBox="1"/>
           <p:nvPr/>
         </p:nvSpPr>
@@ -7898,7 +7988,7 @@
                 </a:solidFill>
                 <a:latin typeface="Calibri"/>
               </a:rPr>
-              <a:t>TALLER — Guion oral y preguntas anticipadas (20 minutos, en parejas) (cont.)</a:t>
+              <a:t>TALLER · cómo se revisa y dónde se entrega</a:t>
             </a:r>
           </a:p>
         </p:txBody>
@@ -7911,8 +8001,8 @@
         </p:nvSpPr>
         <p:spPr>
           <a:xfrm>
-            <a:off x="640080" y="1691639"/>
-            <a:ext cx="10911535" cy="4617720"/>
+            <a:off x="640080" y="1280160"/>
+            <a:ext cx="10911535" cy="411480"/>
           </a:xfrm>
           <a:prstGeom prst="rect">
             <a:avLst/>
@@ -7925,6 +8015,41 @@
           </a:bodyPr>
           <a:lstStyle/>
           <a:p>
+            <a:pPr algn="ctr"/>
+            <a:r>
+              <a:rPr sz="1500" b="0" i="0">
+                <a:solidFill>
+                  <a:srgbClr val="2B2B2B"/>
+                </a:solidFill>
+                <a:latin typeface="Calibri"/>
+              </a:rPr>
+              <a:t>Guion oral y preguntas anticipadas</a:t>
+            </a:r>
+          </a:p>
+        </p:txBody>
+      </p:sp>
+      <p:sp>
+        <p:nvSpPr>
+          <p:cNvPr id="5" name="TextBox 4"/>
+          <p:cNvSpPr txBox="1"/>
+          <p:nvPr/>
+        </p:nvSpPr>
+        <p:spPr>
+          <a:xfrm>
+            <a:off x="640080" y="2011679"/>
+            <a:ext cx="10911535" cy="4297680"/>
+          </a:xfrm>
+          <a:prstGeom prst="rect">
+            <a:avLst/>
+          </a:prstGeom>
+          <a:noFill/>
+        </p:spPr>
+        <p:txBody>
+          <a:bodyPr wrap="square" anchor="t" lIns="0" rIns="0" tIns="0" bIns="0">
+            <a:spAutoFit/>
+          </a:bodyPr>
+          <a:lstStyle/>
+          <a:p>
             <a:pPr>
               <a:spcAft>
                 <a:spcPts val="1000"/>
@@ -7946,7 +8071,16 @@
                 </a:solidFill>
                 <a:latin typeface="Calibri"/>
               </a:rPr>
-              <a:t>Criterio de éxito (verificable):</a:t>
+              <a:t>Quedó bien si</a:t>
+            </a:r>
+            <a:r>
+              <a:rPr sz="1600" b="0" i="0">
+                <a:solidFill>
+                  <a:srgbClr val="2B2B2B"/>
+                </a:solidFill>
+                <a:latin typeface="Calibri"/>
+              </a:rPr>
+              <a:t> —compruébelo usted antes de cerrar el documento—:</a:t>
             </a:r>
           </a:p>
           <a:p>
@@ -8014,7 +8148,7 @@
                 </a:solidFill>
                 <a:latin typeface="Calibri"/>
               </a:rPr>
-              <a:t> (su pareja lo certifica).</a:t>
+              <a:t>: su pareja lo certifica.</a:t>
             </a:r>
           </a:p>
           <a:p>
@@ -8085,11 +8219,203 @@
               <a:t> de memoria.</a:t>
             </a:r>
           </a:p>
-        </p:txBody>
-      </p:sp>
-      <p:sp>
-        <p:nvSpPr>
-          <p:cNvPr id="5" name="TextBox 4"/>
+          <a:p>
+            <a:pPr>
+              <a:spcAft>
+                <a:spcPts val="1000"/>
+              </a:spcAft>
+            </a:pPr>
+            <a:r>
+              <a:rPr sz="1600" b="0" i="0">
+                <a:solidFill>
+                  <a:srgbClr val="2B2B2B"/>
+                </a:solidFill>
+                <a:latin typeface="Calibri"/>
+              </a:rPr>
+              <a:t>–   </a:t>
+            </a:r>
+            <a:r>
+              <a:rPr sz="1600" b="1" i="0">
+                <a:solidFill>
+                  <a:srgbClr val="2B2B2B"/>
+                </a:solidFill>
+                <a:latin typeface="Calibri"/>
+              </a:rPr>
+              <a:t>Plan B:</a:t>
+            </a:r>
+            <a:r>
+              <a:rPr sz="1600" b="0" i="0">
+                <a:solidFill>
+                  <a:srgbClr val="2B2B2B"/>
+                </a:solidFill>
+                <a:latin typeface="Calibri"/>
+              </a:rPr>
+              <a:t> Si se pasa del tiempo, recorte el marco teórico del guion, no los resultados: el jurado pregunta por lo que encontró, no por lo que leyó.</a:t>
+            </a:r>
+          </a:p>
+          <a:p>
+            <a:pPr>
+              <a:spcAft>
+                <a:spcPts val="1000"/>
+              </a:spcAft>
+            </a:pPr>
+            <a:r>
+              <a:rPr sz="1600" b="0" i="0">
+                <a:solidFill>
+                  <a:srgbClr val="2B2B2B"/>
+                </a:solidFill>
+                <a:latin typeface="Calibri"/>
+              </a:rPr>
+              <a:t>–   </a:t>
+            </a:r>
+            <a:r>
+              <a:rPr sz="1600" b="1" i="0">
+                <a:solidFill>
+                  <a:srgbClr val="2B2B2B"/>
+                </a:solidFill>
+                <a:latin typeface="Calibri"/>
+              </a:rPr>
+              <a:t>Hoy no se sube nada al aula:</a:t>
+            </a:r>
+            <a:r>
+              <a:rPr sz="1600" b="0" i="0">
+                <a:solidFill>
+                  <a:srgbClr val="2B2B2B"/>
+                </a:solidFill>
+                <a:latin typeface="Calibri"/>
+              </a:rPr>
+              <a:t> guarde `S12_GuionSustentacion_Apellido` (Google Doc o PDF) en su Drive y tráigalo a la próxima sesión. Es un </a:t>
+            </a:r>
+            <a:r>
+              <a:rPr sz="1600" b="1" i="0">
+                <a:solidFill>
+                  <a:srgbClr val="2B2B2B"/>
+                </a:solidFill>
+                <a:latin typeface="Calibri"/>
+              </a:rPr>
+              <a:t>avance formativo</a:t>
+            </a:r>
+            <a:r>
+              <a:rPr sz="1600" b="0" i="0">
+                <a:solidFill>
+                  <a:srgbClr val="2B2B2B"/>
+                </a:solidFill>
+                <a:latin typeface="Calibri"/>
+              </a:rPr>
+              <a:t>, se revisa en clase.</a:t>
+            </a:r>
+          </a:p>
+          <a:p>
+            <a:pPr>
+              <a:spcAft>
+                <a:spcPts val="1000"/>
+              </a:spcAft>
+            </a:pPr>
+            <a:r>
+              <a:rPr sz="1600" b="0" i="0">
+                <a:solidFill>
+                  <a:srgbClr val="2B2B2B"/>
+                </a:solidFill>
+                <a:latin typeface="Calibri"/>
+              </a:rPr>
+              <a:t>–   </a:t>
+            </a:r>
+            <a:r>
+              <a:rPr sz="1600" b="1" i="0">
+                <a:solidFill>
+                  <a:srgbClr val="2B2B2B"/>
+                </a:solidFill>
+                <a:latin typeface="Calibri"/>
+              </a:rPr>
+              <a:t>Esto alimenta:</a:t>
+            </a:r>
+            <a:r>
+              <a:rPr sz="1600" b="0" i="0">
+                <a:solidFill>
+                  <a:srgbClr val="2B2B2B"/>
+                </a:solidFill>
+                <a:latin typeface="Calibri"/>
+              </a:rPr>
+              <a:t> </a:t>
+            </a:r>
+            <a:r>
+              <a:rPr sz="1600" b="1" i="0">
+                <a:solidFill>
+                  <a:srgbClr val="2B2B2B"/>
+                </a:solidFill>
+                <a:latin typeface="Calibri"/>
+              </a:rPr>
+              <a:t>ACA Final</a:t>
+            </a:r>
+            <a:r>
+              <a:rPr sz="1600" b="0" i="0">
+                <a:solidFill>
+                  <a:srgbClr val="2B2B2B"/>
+                </a:solidFill>
+                <a:latin typeface="Calibri"/>
+              </a:rPr>
+              <a:t> —tarea, 32%—, el documento que </a:t>
+            </a:r>
+            <a:r>
+              <a:rPr sz="1600" b="1" i="0">
+                <a:solidFill>
+                  <a:srgbClr val="2B2B2B"/>
+                </a:solidFill>
+                <a:latin typeface="Calibri"/>
+              </a:rPr>
+              <a:t>sí</a:t>
+            </a:r>
+            <a:r>
+              <a:rPr sz="1600" b="0" i="0">
+                <a:solidFill>
+                  <a:srgbClr val="2B2B2B"/>
+                </a:solidFill>
+                <a:latin typeface="Calibri"/>
+              </a:rPr>
+              <a:t> recibe </a:t>
+            </a:r>
+            <a:r>
+              <a:rPr sz="1600" b="1" i="0">
+                <a:solidFill>
+                  <a:srgbClr val="2B2B2B"/>
+                </a:solidFill>
+                <a:latin typeface="Calibri"/>
+              </a:rPr>
+              <a:t>el aula de su grupo</a:t>
+            </a:r>
+            <a:r>
+              <a:rPr sz="1600" b="0" i="0">
+                <a:solidFill>
+                  <a:srgbClr val="2B2B2B"/>
+                </a:solidFill>
+                <a:latin typeface="Calibri"/>
+              </a:rPr>
+              <a:t> en CDigital; cierra en la semana de la </a:t>
+            </a:r>
+            <a:r>
+              <a:rPr sz="1600" b="1" i="0">
+                <a:solidFill>
+                  <a:srgbClr val="2B2B2B"/>
+                </a:solidFill>
+                <a:latin typeface="Calibri"/>
+              </a:rPr>
+              <a:t>Sesión 13</a:t>
+            </a:r>
+            <a:r>
+              <a:rPr sz="1600" b="0" i="0">
+                <a:solidFill>
+                  <a:srgbClr val="2B2B2B"/>
+                </a:solidFill>
+                <a:latin typeface="Calibri"/>
+              </a:rPr>
+              <a:t>.</a:t>
+            </a:r>
+          </a:p>
+        </p:txBody>
+      </p:sp>
+      <p:sp>
+        <p:nvSpPr>
+          <p:cNvPr id="6" name="TextBox 5"/>
           <p:cNvSpPr txBox="1"/>
           <p:nvPr/>
         </p:nvSpPr>
@@ -8602,7 +8928,7 @@
                 </a:solidFill>
                 <a:latin typeface="Calibri"/>
               </a:rPr>
-              <a:t>Tenga a la mano su artículo, su póster y un </a:t>
+              <a:t>Tenga a la mano su documento, su póster y un </a:t>
             </a:r>
             <a:r>
               <a:rPr sz="1200" b="1" i="1">
@@ -10251,7 +10577,25 @@
                 </a:solidFill>
                 <a:latin typeface="Calibri"/>
               </a:rPr>
-              <a:t> `S12_GuionSustentacion_Apellido` a CDigital — [URL CDigital — campus del curso pendiente].</a:t>
+              <a:t> `S12_GuionSustentacion_Apellido` a CDigital — el aula de </a:t>
+            </a:r>
+            <a:r>
+              <a:rPr sz="1600" b="1" i="0">
+                <a:solidFill>
+                  <a:srgbClr val="2B2B2B"/>
+                </a:solidFill>
+                <a:latin typeface="Calibri"/>
+              </a:rPr>
+              <a:t>su grupo</a:t>
+            </a:r>
+            <a:r>
+              <a:rPr sz="1600" b="0" i="0">
+                <a:solidFill>
+                  <a:srgbClr val="2B2B2B"/>
+                </a:solidFill>
+                <a:latin typeface="Calibri"/>
+              </a:rPr>
+              <a:t> en CDigital.</a:t>
             </a:r>
           </a:p>
           <a:p>
@@ -10473,7 +10817,7 @@
                 </a:solidFill>
                 <a:latin typeface="Calibri"/>
               </a:rPr>
-              <a:t>, que es donde su artículo queda publicado.</a:t>
+              <a:t>, que es donde su documento queda publicado.</a:t>
             </a:r>
           </a:p>
           <a:p>
@@ -10498,7 +10842,7 @@
                 </a:solidFill>
                 <a:latin typeface="Calibri"/>
               </a:rPr>
-              <a:t>artículo final</a:t>
+              <a:t>documento final</a:t>
             </a:r>
             <a:r>
               <a:rPr sz="1500" b="0" i="0">
@@ -10592,6 +10936,1214 @@
 </file>
 
 <file path=ppt/slides/slide24.xml><?xml version="1.0" encoding="utf-8"?>
+<p:sld xmlns:a="http://schemas.openxmlformats.org/drawingml/2006/main" xmlns:p="http://schemas.openxmlformats.org/presentationml/2006/main" xmlns:r="http://schemas.openxmlformats.org/officeDocument/2006/relationships">
+  <p:cSld>
+    <p:bg>
+      <p:bgPr>
+        <a:solidFill>
+          <a:srgbClr val="FFFFFF"/>
+        </a:solidFill>
+        <a:effectLst/>
+      </p:bgPr>
+    </p:bg>
+    <p:spTree>
+      <p:nvGrpSpPr>
+        <p:cNvPr id="1" name=""/>
+        <p:cNvGrpSpPr/>
+        <p:nvPr/>
+      </p:nvGrpSpPr>
+      <p:grpSpPr/>
+      <p:sp>
+        <p:nvSpPr>
+          <p:cNvPr id="2" name="Rectangle 1"/>
+          <p:cNvSpPr/>
+          <p:nvPr/>
+        </p:nvSpPr>
+        <p:spPr>
+          <a:xfrm>
+            <a:off x="0" y="0"/>
+            <a:ext cx="12191695" cy="1188720"/>
+          </a:xfrm>
+          <a:prstGeom prst="rect">
+            <a:avLst/>
+          </a:prstGeom>
+          <a:solidFill>
+            <a:srgbClr val="0C2340"/>
+          </a:solidFill>
+          <a:ln>
+            <a:noFill/>
+          </a:ln>
+          <a:effectLst/>
+        </p:spPr>
+        <p:style>
+          <a:lnRef idx="1">
+            <a:schemeClr val="accent1"/>
+          </a:lnRef>
+          <a:fillRef idx="3">
+            <a:schemeClr val="accent1"/>
+          </a:fillRef>
+          <a:effectRef idx="2">
+            <a:schemeClr val="accent1"/>
+          </a:effectRef>
+          <a:fontRef idx="minor">
+            <a:schemeClr val="lt1"/>
+          </a:fontRef>
+        </p:style>
+        <p:txBody>
+          <a:bodyPr rtlCol="0" anchor="ctr"/>
+          <a:lstStyle/>
+          <a:p>
+            <a:pPr algn="ctr"/>
+          </a:p>
+        </p:txBody>
+      </p:sp>
+      <p:sp>
+        <p:nvSpPr>
+          <p:cNvPr id="3" name="TextBox 2"/>
+          <p:cNvSpPr txBox="1"/>
+          <p:nvPr/>
+        </p:nvSpPr>
+        <p:spPr>
+          <a:xfrm>
+            <a:off x="640080" y="0"/>
+            <a:ext cx="9082735" cy="1188720"/>
+          </a:xfrm>
+          <a:prstGeom prst="rect">
+            <a:avLst/>
+          </a:prstGeom>
+          <a:noFill/>
+        </p:spPr>
+        <p:txBody>
+          <a:bodyPr wrap="square" anchor="ctr" lIns="0" rIns="0" tIns="0" bIns="0">
+            <a:spAutoFit/>
+          </a:bodyPr>
+          <a:lstStyle/>
+          <a:p>
+            <a:pPr algn="ctr"/>
+            <a:r>
+              <a:rPr sz="2600" b="1" i="0">
+                <a:solidFill>
+                  <a:srgbClr val="FFFFFF"/>
+                </a:solidFill>
+                <a:latin typeface="Calibri"/>
+              </a:rPr>
+              <a:t>RUTA DE ENTREGABLES DEL CURSO</a:t>
+            </a:r>
+          </a:p>
+        </p:txBody>
+      </p:sp>
+      <p:sp>
+        <p:nvSpPr>
+          <p:cNvPr id="4" name="TextBox 3"/>
+          <p:cNvSpPr txBox="1"/>
+          <p:nvPr/>
+        </p:nvSpPr>
+        <p:spPr>
+          <a:xfrm>
+            <a:off x="640080" y="1280160"/>
+            <a:ext cx="10911535" cy="411480"/>
+          </a:xfrm>
+          <a:prstGeom prst="rect">
+            <a:avLst/>
+          </a:prstGeom>
+          <a:noFill/>
+        </p:spPr>
+        <p:txBody>
+          <a:bodyPr wrap="square" anchor="t" lIns="0" rIns="0" tIns="0" bIns="0">
+            <a:spAutoFit/>
+          </a:bodyPr>
+          <a:lstStyle/>
+          <a:p>
+            <a:pPr algn="ctr"/>
+            <a:r>
+              <a:rPr sz="1500" b="0" i="0">
+                <a:solidFill>
+                  <a:srgbClr val="2B2B2B"/>
+                </a:solidFill>
+                <a:latin typeface="Calibri"/>
+              </a:rPr>
+              <a:t>Sin fechas a propósito: aquí va </a:t>
+            </a:r>
+            <a:r>
+              <a:rPr sz="1500" b="1" i="0">
+                <a:solidFill>
+                  <a:srgbClr val="2B2B2B"/>
+                </a:solidFill>
+                <a:latin typeface="Calibri"/>
+              </a:rPr>
+              <a:t>en qué punto del curso</a:t>
+            </a:r>
+            <a:r>
+              <a:rPr sz="1500" b="0" i="0">
+                <a:solidFill>
+                  <a:srgbClr val="2B2B2B"/>
+                </a:solidFill>
+                <a:latin typeface="Calibri"/>
+              </a:rPr>
+              <a:t> cierra cada ítem · la ventana exacta la fija CDigital</a:t>
+            </a:r>
+          </a:p>
+        </p:txBody>
+      </p:sp>
+      <p:graphicFrame>
+        <p:nvGraphicFramePr>
+          <p:cNvPr id="5" name="Table 4"/>
+          <p:cNvGraphicFramePr>
+            <a:graphicFrameLocks noGrp="1"/>
+          </p:cNvGraphicFramePr>
+          <p:nvPr/>
+        </p:nvGraphicFramePr>
+        <p:xfrm>
+          <a:off x="640080" y="2011679"/>
+          <a:ext cx="10911533" cy="4297680"/>
+        </p:xfrm>
+        <a:graphic>
+          <a:graphicData uri="http://schemas.openxmlformats.org/drawingml/2006/table">
+            <a:tbl>
+              <a:tblPr>
+                <a:tableStyleId>{2D5ABB26-0587-4C30-8999-92F81FD0307C}</a:tableStyleId>
+              </a:tblPr>
+              <a:tblGrid>
+                <a:gridCol w="2659113"/>
+                <a:gridCol w="2659113"/>
+                <a:gridCol w="5593307"/>
+              </a:tblGrid>
+              <a:tr h="477520">
+                <a:tc>
+                  <a:txBody>
+                    <a:bodyPr/>
+                    <a:lstStyle/>
+                    <a:p>
+                      <a:pPr algn="l"/>
+                      <a:r>
+                        <a:rPr sz="1300" b="1" i="0">
+                          <a:solidFill>
+                            <a:srgbClr val="FFFFFF"/>
+                          </a:solidFill>
+                          <a:latin typeface="Calibri"/>
+                        </a:rPr>
+                        <a:t>Cierra en la semana de…</a:t>
+                      </a:r>
+                    </a:p>
+                  </a:txBody>
+                  <a:tcPr anchor="ctr" marL="109728" marR="91440" marT="36576" marB="36576">
+                    <a:solidFill>
+                      <a:srgbClr val="0C2340"/>
+                    </a:solidFill>
+                  </a:tcPr>
+                </a:tc>
+                <a:tc>
+                  <a:txBody>
+                    <a:bodyPr/>
+                    <a:lstStyle/>
+                    <a:p>
+                      <a:pPr algn="l"/>
+                      <a:r>
+                        <a:rPr sz="1300" b="1" i="0">
+                          <a:solidFill>
+                            <a:srgbClr val="FFFFFF"/>
+                          </a:solidFill>
+                          <a:latin typeface="Calibri"/>
+                        </a:rPr>
+                        <a:t>Entregable</a:t>
+                      </a:r>
+                    </a:p>
+                  </a:txBody>
+                  <a:tcPr anchor="ctr" marL="109728" marR="91440" marT="36576" marB="36576">
+                    <a:solidFill>
+                      <a:srgbClr val="0C2340"/>
+                    </a:solidFill>
+                  </a:tcPr>
+                </a:tc>
+                <a:tc>
+                  <a:txBody>
+                    <a:bodyPr/>
+                    <a:lstStyle/>
+                    <a:p>
+                      <a:pPr algn="l"/>
+                      <a:r>
+                        <a:rPr sz="1300" b="1" i="0">
+                          <a:solidFill>
+                            <a:srgbClr val="FFFFFF"/>
+                          </a:solidFill>
+                          <a:latin typeface="Calibri"/>
+                        </a:rPr>
+                        <a:t>Qué debes tener listo</a:t>
+                      </a:r>
+                    </a:p>
+                  </a:txBody>
+                  <a:tcPr anchor="ctr" marL="109728" marR="91440" marT="36576" marB="36576">
+                    <a:solidFill>
+                      <a:srgbClr val="0C2340"/>
+                    </a:solidFill>
+                  </a:tcPr>
+                </a:tc>
+              </a:tr>
+              <a:tr h="477520">
+                <a:tc>
+                  <a:txBody>
+                    <a:bodyPr/>
+                    <a:lstStyle/>
+                    <a:p>
+                      <a:pPr algn="l"/>
+                      <a:r>
+                        <a:rPr sz="1100" b="1" i="0">
+                          <a:solidFill>
+                            <a:srgbClr val="2B2B2B"/>
+                          </a:solidFill>
+                          <a:latin typeface="Calibri"/>
+                        </a:rPr>
+                        <a:t>Sesión 03</a:t>
+                      </a:r>
+                      <a:r>
+                        <a:rPr sz="1100" b="0" i="0">
+                          <a:solidFill>
+                            <a:srgbClr val="2B2B2B"/>
+                          </a:solidFill>
+                          <a:latin typeface="Calibri"/>
+                        </a:rPr>
+                        <a:t> · ya cerró</a:t>
+                      </a:r>
+                    </a:p>
+                  </a:txBody>
+                  <a:tcPr anchor="ctr" marL="109728" marR="91440" marT="36576" marB="36576">
+                    <a:solidFill>
+                      <a:srgbClr val="FFFFFF"/>
+                    </a:solidFill>
+                  </a:tcPr>
+                </a:tc>
+                <a:tc>
+                  <a:txBody>
+                    <a:bodyPr/>
+                    <a:lstStyle/>
+                    <a:p>
+                      <a:pPr algn="l"/>
+                      <a:r>
+                        <a:rPr sz="1100" b="1" i="0">
+                          <a:solidFill>
+                            <a:srgbClr val="2B2B2B"/>
+                          </a:solidFill>
+                          <a:latin typeface="Calibri"/>
+                        </a:rPr>
+                        <a:t>Quiz 1</a:t>
+                      </a:r>
+                      <a:r>
+                        <a:rPr sz="1100" b="0" i="0">
+                          <a:solidFill>
+                            <a:srgbClr val="2B2B2B"/>
+                          </a:solidFill>
+                          <a:latin typeface="Calibri"/>
+                        </a:rPr>
+                        <a:t> · Cuestionario · 6%</a:t>
+                      </a:r>
+                    </a:p>
+                  </a:txBody>
+                  <a:tcPr anchor="ctr" marL="109728" marR="91440" marT="36576" marB="36576">
+                    <a:solidFill>
+                      <a:srgbClr val="FFFFFF"/>
+                    </a:solidFill>
+                  </a:tcPr>
+                </a:tc>
+                <a:tc>
+                  <a:txBody>
+                    <a:bodyPr/>
+                    <a:lstStyle/>
+                    <a:p>
+                      <a:pPr algn="l"/>
+                      <a:r>
+                        <a:rPr sz="1100" b="0" i="0">
+                          <a:solidFill>
+                            <a:srgbClr val="2B2B2B"/>
+                          </a:solidFill>
+                          <a:latin typeface="Calibri"/>
+                        </a:rPr>
+                        <a:t>Repasa </a:t>
+                      </a:r>
+                      <a:r>
+                        <a:rPr sz="1100" b="1" i="0">
+                          <a:solidFill>
+                            <a:srgbClr val="2B2B2B"/>
+                          </a:solidFill>
+                          <a:latin typeface="Calibri"/>
+                        </a:rPr>
+                        <a:t>pregunta, objetivos y título</a:t>
+                      </a:r>
+                      <a:r>
+                        <a:rPr sz="1100" b="0" i="0">
+                          <a:solidFill>
+                            <a:srgbClr val="2B2B2B"/>
+                          </a:solidFill>
+                          <a:latin typeface="Calibri"/>
+                        </a:rPr>
+                        <a:t> y las variables de la pregunta-problema.</a:t>
+                      </a:r>
+                    </a:p>
+                  </a:txBody>
+                  <a:tcPr anchor="ctr" marL="109728" marR="91440" marT="36576" marB="36576">
+                    <a:solidFill>
+                      <a:srgbClr val="FFFFFF"/>
+                    </a:solidFill>
+                  </a:tcPr>
+                </a:tc>
+              </a:tr>
+              <a:tr h="477520">
+                <a:tc>
+                  <a:txBody>
+                    <a:bodyPr/>
+                    <a:lstStyle/>
+                    <a:p>
+                      <a:pPr algn="l"/>
+                      <a:r>
+                        <a:rPr sz="1100" b="1" i="0">
+                          <a:solidFill>
+                            <a:srgbClr val="2B2B2B"/>
+                          </a:solidFill>
+                          <a:latin typeface="Calibri"/>
+                        </a:rPr>
+                        <a:t>Sesión 06</a:t>
+                      </a:r>
+                      <a:r>
+                        <a:rPr sz="1100" b="0" i="0">
+                          <a:solidFill>
+                            <a:srgbClr val="2B2B2B"/>
+                          </a:solidFill>
+                          <a:latin typeface="Calibri"/>
+                        </a:rPr>
+                        <a:t> · ya cerró</a:t>
+                      </a:r>
+                    </a:p>
+                  </a:txBody>
+                  <a:tcPr anchor="ctr" marL="109728" marR="91440" marT="36576" marB="36576">
+                    <a:solidFill>
+                      <a:srgbClr val="F2F2F2"/>
+                    </a:solidFill>
+                  </a:tcPr>
+                </a:tc>
+                <a:tc>
+                  <a:txBody>
+                    <a:bodyPr/>
+                    <a:lstStyle/>
+                    <a:p>
+                      <a:pPr algn="l"/>
+                      <a:r>
+                        <a:rPr sz="1100" b="1" i="0">
+                          <a:solidFill>
+                            <a:srgbClr val="2B2B2B"/>
+                          </a:solidFill>
+                          <a:latin typeface="Calibri"/>
+                        </a:rPr>
+                        <a:t>Parcial 1</a:t>
+                      </a:r>
+                      <a:r>
+                        <a:rPr sz="1100" b="0" i="0">
+                          <a:solidFill>
+                            <a:srgbClr val="2B2B2B"/>
+                          </a:solidFill>
+                          <a:latin typeface="Calibri"/>
+                        </a:rPr>
+                        <a:t> · Cuestionario · 24%</a:t>
+                      </a:r>
+                    </a:p>
+                  </a:txBody>
+                  <a:tcPr anchor="ctr" marL="109728" marR="91440" marT="36576" marB="36576">
+                    <a:solidFill>
+                      <a:srgbClr val="F2F2F2"/>
+                    </a:solidFill>
+                  </a:tcPr>
+                </a:tc>
+                <a:tc>
+                  <a:txBody>
+                    <a:bodyPr/>
+                    <a:lstStyle/>
+                    <a:p>
+                      <a:pPr algn="l"/>
+                      <a:r>
+                        <a:rPr sz="1100" b="0" i="0">
+                          <a:solidFill>
+                            <a:srgbClr val="2B2B2B"/>
+                          </a:solidFill>
+                          <a:latin typeface="Calibri"/>
+                        </a:rPr>
+                        <a:t>Estudia la </a:t>
+                      </a:r>
+                      <a:r>
+                        <a:rPr sz="1100" b="1" i="0">
+                          <a:solidFill>
+                            <a:srgbClr val="2B2B2B"/>
+                          </a:solidFill>
+                          <a:latin typeface="Calibri"/>
+                        </a:rPr>
+                        <a:t>introducción</a:t>
+                      </a:r>
+                      <a:r>
+                        <a:rPr sz="1100" b="0" i="0">
+                          <a:solidFill>
+                            <a:srgbClr val="2B2B2B"/>
+                          </a:solidFill>
+                          <a:latin typeface="Calibri"/>
+                        </a:rPr>
+                        <a:t>, los referentes Fase I y el instrumento ya diseñado.</a:t>
+                      </a:r>
+                    </a:p>
+                  </a:txBody>
+                  <a:tcPr anchor="ctr" marL="109728" marR="91440" marT="36576" marB="36576">
+                    <a:solidFill>
+                      <a:srgbClr val="F2F2F2"/>
+                    </a:solidFill>
+                  </a:tcPr>
+                </a:tc>
+              </a:tr>
+              <a:tr h="477520">
+                <a:tc>
+                  <a:txBody>
+                    <a:bodyPr/>
+                    <a:lstStyle/>
+                    <a:p>
+                      <a:pPr algn="l"/>
+                      <a:r>
+                        <a:rPr sz="1100" b="1" i="0">
+                          <a:solidFill>
+                            <a:srgbClr val="2B2B2B"/>
+                          </a:solidFill>
+                          <a:latin typeface="Calibri"/>
+                        </a:rPr>
+                        <a:t>Sesión 08</a:t>
+                      </a:r>
+                      <a:r>
+                        <a:rPr sz="1100" b="0" i="0">
+                          <a:solidFill>
+                            <a:srgbClr val="2B2B2B"/>
+                          </a:solidFill>
+                          <a:latin typeface="Calibri"/>
+                        </a:rPr>
+                        <a:t> · ya cerró</a:t>
+                      </a:r>
+                    </a:p>
+                  </a:txBody>
+                  <a:tcPr anchor="ctr" marL="109728" marR="91440" marT="36576" marB="36576">
+                    <a:solidFill>
+                      <a:srgbClr val="FFFFFF"/>
+                    </a:solidFill>
+                  </a:tcPr>
+                </a:tc>
+                <a:tc>
+                  <a:txBody>
+                    <a:bodyPr/>
+                    <a:lstStyle/>
+                    <a:p>
+                      <a:pPr algn="l"/>
+                      <a:r>
+                        <a:rPr sz="1100" b="1" i="0">
+                          <a:solidFill>
+                            <a:srgbClr val="2B2B2B"/>
+                          </a:solidFill>
+                          <a:latin typeface="Calibri"/>
+                        </a:rPr>
+                        <a:t>Quiz 2</a:t>
+                      </a:r>
+                      <a:r>
+                        <a:rPr sz="1100" b="0" i="0">
+                          <a:solidFill>
+                            <a:srgbClr val="2B2B2B"/>
+                          </a:solidFill>
+                          <a:latin typeface="Calibri"/>
+                        </a:rPr>
+                        <a:t> · Cuestionario · 9%</a:t>
+                      </a:r>
+                    </a:p>
+                  </a:txBody>
+                  <a:tcPr anchor="ctr" marL="109728" marR="91440" marT="36576" marB="36576">
+                    <a:solidFill>
+                      <a:srgbClr val="FFFFFF"/>
+                    </a:solidFill>
+                  </a:tcPr>
+                </a:tc>
+                <a:tc>
+                  <a:txBody>
+                    <a:bodyPr/>
+                    <a:lstStyle/>
+                    <a:p>
+                      <a:pPr algn="l"/>
+                      <a:r>
+                        <a:rPr sz="1100" b="0" i="0">
+                          <a:solidFill>
+                            <a:srgbClr val="2B2B2B"/>
+                          </a:solidFill>
+                          <a:latin typeface="Calibri"/>
+                        </a:rPr>
+                        <a:t>Estudia </a:t>
+                      </a:r>
+                      <a:r>
+                        <a:rPr sz="1100" b="1" i="0">
+                          <a:solidFill>
+                            <a:srgbClr val="2B2B2B"/>
+                          </a:solidFill>
+                          <a:latin typeface="Calibri"/>
+                        </a:rPr>
+                        <a:t>comunidades de práctica</a:t>
+                      </a:r>
+                      <a:r>
+                        <a:rPr sz="1100" b="0" i="0">
+                          <a:solidFill>
+                            <a:srgbClr val="2B2B2B"/>
+                          </a:solidFill>
+                          <a:latin typeface="Calibri"/>
+                        </a:rPr>
+                        <a:t>, co-creación y análisis de datos.</a:t>
+                      </a:r>
+                    </a:p>
+                  </a:txBody>
+                  <a:tcPr anchor="ctr" marL="109728" marR="91440" marT="36576" marB="36576">
+                    <a:solidFill>
+                      <a:srgbClr val="FFFFFF"/>
+                    </a:solidFill>
+                  </a:tcPr>
+                </a:tc>
+              </a:tr>
+              <a:tr h="477520">
+                <a:tc>
+                  <a:txBody>
+                    <a:bodyPr/>
+                    <a:lstStyle/>
+                    <a:p>
+                      <a:pPr algn="l"/>
+                      <a:r>
+                        <a:rPr sz="1100" b="1" i="0">
+                          <a:solidFill>
+                            <a:srgbClr val="2B2B2B"/>
+                          </a:solidFill>
+                          <a:latin typeface="Calibri"/>
+                        </a:rPr>
+                        <a:t>Sesión 10</a:t>
+                      </a:r>
+                      <a:r>
+                        <a:rPr sz="1100" b="0" i="0">
+                          <a:solidFill>
+                            <a:srgbClr val="2B2B2B"/>
+                          </a:solidFill>
+                          <a:latin typeface="Calibri"/>
+                        </a:rPr>
+                        <a:t> · ya cerró</a:t>
+                      </a:r>
+                    </a:p>
+                  </a:txBody>
+                  <a:tcPr anchor="ctr" marL="109728" marR="91440" marT="36576" marB="36576">
+                    <a:solidFill>
+                      <a:srgbClr val="F2F2F2"/>
+                    </a:solidFill>
+                  </a:tcPr>
+                </a:tc>
+                <a:tc>
+                  <a:txBody>
+                    <a:bodyPr/>
+                    <a:lstStyle/>
+                    <a:p>
+                      <a:pPr algn="l"/>
+                      <a:r>
+                        <a:rPr sz="1100" b="1" i="0">
+                          <a:solidFill>
+                            <a:srgbClr val="2B2B2B"/>
+                          </a:solidFill>
+                          <a:latin typeface="Calibri"/>
+                        </a:rPr>
+                        <a:t>Parcial 2</a:t>
+                      </a:r>
+                      <a:r>
+                        <a:rPr sz="1100" b="0" i="0">
+                          <a:solidFill>
+                            <a:srgbClr val="2B2B2B"/>
+                          </a:solidFill>
+                          <a:latin typeface="Calibri"/>
+                        </a:rPr>
+                        <a:t> · Cuestionario · 21%</a:t>
+                      </a:r>
+                    </a:p>
+                  </a:txBody>
+                  <a:tcPr anchor="ctr" marL="109728" marR="91440" marT="36576" marB="36576">
+                    <a:solidFill>
+                      <a:srgbClr val="F2F2F2"/>
+                    </a:solidFill>
+                  </a:tcPr>
+                </a:tc>
+                <a:tc>
+                  <a:txBody>
+                    <a:bodyPr/>
+                    <a:lstStyle/>
+                    <a:p>
+                      <a:pPr algn="l"/>
+                      <a:r>
+                        <a:rPr sz="1100" b="0" i="0">
+                          <a:solidFill>
+                            <a:srgbClr val="2B2B2B"/>
+                          </a:solidFill>
+                          <a:latin typeface="Calibri"/>
+                        </a:rPr>
+                        <a:t>Estudia el cierre del </a:t>
+                      </a:r>
+                      <a:r>
+                        <a:rPr sz="1100" b="1" i="0">
+                          <a:solidFill>
+                            <a:srgbClr val="2B2B2B"/>
+                          </a:solidFill>
+                          <a:latin typeface="Calibri"/>
+                        </a:rPr>
+                        <a:t>marco teórico</a:t>
+                      </a:r>
+                      <a:r>
+                        <a:rPr sz="1100" b="0" i="0">
+                          <a:solidFill>
+                            <a:srgbClr val="2B2B2B"/>
+                          </a:solidFill>
+                          <a:latin typeface="Calibri"/>
+                        </a:rPr>
+                        <a:t>, los resultados y la discusión.</a:t>
+                      </a:r>
+                    </a:p>
+                  </a:txBody>
+                  <a:tcPr anchor="ctr" marL="109728" marR="91440" marT="36576" marB="36576">
+                    <a:solidFill>
+                      <a:srgbClr val="F2F2F2"/>
+                    </a:solidFill>
+                  </a:tcPr>
+                </a:tc>
+              </a:tr>
+              <a:tr h="477520">
+                <a:tc>
+                  <a:txBody>
+                    <a:bodyPr/>
+                    <a:lstStyle/>
+                    <a:p>
+                      <a:pPr algn="l"/>
+                      <a:r>
+                        <a:rPr sz="1100" b="1" i="0">
+                          <a:solidFill>
+                            <a:srgbClr val="2B2B2B"/>
+                          </a:solidFill>
+                          <a:latin typeface="Calibri"/>
+                        </a:rPr>
+                        <a:t>Sesión 12</a:t>
+                      </a:r>
+                      <a:r>
+                        <a:rPr sz="1100" b="0" i="0">
+                          <a:solidFill>
+                            <a:srgbClr val="2B2B2B"/>
+                          </a:solidFill>
+                          <a:latin typeface="Calibri"/>
+                        </a:rPr>
+                        <a:t> · cierra esta semana</a:t>
+                      </a:r>
+                    </a:p>
+                  </a:txBody>
+                  <a:tcPr anchor="ctr" marL="109728" marR="91440" marT="36576" marB="36576">
+                    <a:solidFill>
+                      <a:srgbClr val="FFFFFF"/>
+                    </a:solidFill>
+                  </a:tcPr>
+                </a:tc>
+                <a:tc>
+                  <a:txBody>
+                    <a:bodyPr/>
+                    <a:lstStyle/>
+                    <a:p>
+                      <a:pPr algn="l"/>
+                      <a:r>
+                        <a:rPr sz="1100" b="1" i="0">
+                          <a:solidFill>
+                            <a:srgbClr val="2B2B2B"/>
+                          </a:solidFill>
+                          <a:latin typeface="Calibri"/>
+                        </a:rPr>
+                        <a:t>Quiz 3</a:t>
+                      </a:r>
+                      <a:r>
+                        <a:rPr sz="1100" b="0" i="0">
+                          <a:solidFill>
+                            <a:srgbClr val="2B2B2B"/>
+                          </a:solidFill>
+                          <a:latin typeface="Calibri"/>
+                        </a:rPr>
+                        <a:t> · Cuestionario · 4%</a:t>
+                      </a:r>
+                    </a:p>
+                  </a:txBody>
+                  <a:tcPr anchor="ctr" marL="109728" marR="91440" marT="36576" marB="36576">
+                    <a:solidFill>
+                      <a:srgbClr val="FFFFFF"/>
+                    </a:solidFill>
+                  </a:tcPr>
+                </a:tc>
+                <a:tc>
+                  <a:txBody>
+                    <a:bodyPr/>
+                    <a:lstStyle/>
+                    <a:p>
+                      <a:pPr algn="l"/>
+                      <a:r>
+                        <a:rPr sz="1100" b="0" i="0">
+                          <a:solidFill>
+                            <a:srgbClr val="2B2B2B"/>
+                          </a:solidFill>
+                          <a:latin typeface="Calibri"/>
+                        </a:rPr>
+                        <a:t>Ten claros </a:t>
+                      </a:r>
+                      <a:r>
+                        <a:rPr sz="1100" b="1" i="0">
+                          <a:solidFill>
+                            <a:srgbClr val="2B2B2B"/>
+                          </a:solidFill>
+                          <a:latin typeface="Calibri"/>
+                        </a:rPr>
+                        <a:t>resumen</a:t>
+                      </a:r>
+                      <a:r>
+                        <a:rPr sz="1100" b="0" i="0">
+                          <a:solidFill>
+                            <a:srgbClr val="2B2B2B"/>
+                          </a:solidFill>
+                          <a:latin typeface="Calibri"/>
+                        </a:rPr>
+                        <a:t>, palabras clave UNESCO, póster y verificación antiplagio.</a:t>
+                      </a:r>
+                    </a:p>
+                  </a:txBody>
+                  <a:tcPr anchor="ctr" marL="109728" marR="91440" marT="36576" marB="36576">
+                    <a:solidFill>
+                      <a:srgbClr val="FFFFFF"/>
+                    </a:solidFill>
+                  </a:tcPr>
+                </a:tc>
+              </a:tr>
+              <a:tr h="477520">
+                <a:tc>
+                  <a:txBody>
+                    <a:bodyPr/>
+                    <a:lstStyle/>
+                    <a:p>
+                      <a:pPr algn="l"/>
+                      <a:r>
+                        <a:rPr sz="1100" b="1" i="0">
+                          <a:solidFill>
+                            <a:srgbClr val="2B2B2B"/>
+                          </a:solidFill>
+                          <a:latin typeface="Calibri"/>
+                        </a:rPr>
+                        <a:t>Sesión 13</a:t>
+                      </a:r>
+                      <a:r>
+                        <a:rPr sz="1100" b="0" i="0">
+                          <a:solidFill>
+                            <a:srgbClr val="2B2B2B"/>
+                          </a:solidFill>
+                          <a:latin typeface="Calibri"/>
+                        </a:rPr>
+                        <a:t> · pendiente</a:t>
+                      </a:r>
+                    </a:p>
+                  </a:txBody>
+                  <a:tcPr anchor="ctr" marL="109728" marR="91440" marT="36576" marB="36576">
+                    <a:solidFill>
+                      <a:srgbClr val="F2F2F2"/>
+                    </a:solidFill>
+                  </a:tcPr>
+                </a:tc>
+                <a:tc>
+                  <a:txBody>
+                    <a:bodyPr/>
+                    <a:lstStyle/>
+                    <a:p>
+                      <a:pPr algn="l"/>
+                      <a:r>
+                        <a:rPr sz="1100" b="1" i="0">
+                          <a:solidFill>
+                            <a:srgbClr val="2B2B2B"/>
+                          </a:solidFill>
+                          <a:latin typeface="Calibri"/>
+                        </a:rPr>
+                        <a:t>ACA Final</a:t>
+                      </a:r>
+                      <a:r>
+                        <a:rPr sz="1100" b="0" i="0">
+                          <a:solidFill>
+                            <a:srgbClr val="2B2B2B"/>
+                          </a:solidFill>
+                          <a:latin typeface="Calibri"/>
+                        </a:rPr>
+                        <a:t> · Tarea · 32%</a:t>
+                      </a:r>
+                    </a:p>
+                  </a:txBody>
+                  <a:tcPr anchor="ctr" marL="109728" marR="91440" marT="36576" marB="36576">
+                    <a:solidFill>
+                      <a:srgbClr val="F2F2F2"/>
+                    </a:solidFill>
+                  </a:tcPr>
+                </a:tc>
+                <a:tc>
+                  <a:txBody>
+                    <a:bodyPr/>
+                    <a:lstStyle/>
+                    <a:p>
+                      <a:pPr algn="l"/>
+                      <a:r>
+                        <a:rPr sz="1100" b="0" i="0">
+                          <a:solidFill>
+                            <a:srgbClr val="2B2B2B"/>
+                          </a:solidFill>
+                          <a:latin typeface="Calibri"/>
+                        </a:rPr>
+                        <a:t>Sube el </a:t>
+                      </a:r>
+                      <a:r>
+                        <a:rPr sz="1100" b="1" i="0">
+                          <a:solidFill>
+                            <a:srgbClr val="2B2B2B"/>
+                          </a:solidFill>
+                          <a:latin typeface="Calibri"/>
+                        </a:rPr>
+                        <a:t>documento final</a:t>
+                      </a:r>
+                      <a:r>
+                        <a:rPr sz="1100" b="0" i="0">
+                          <a:solidFill>
+                            <a:srgbClr val="2B2B2B"/>
+                          </a:solidFill>
+                          <a:latin typeface="Calibri"/>
+                        </a:rPr>
+                        <a:t> en plantilla APA CUN: mínimo 4.000 palabras y 50 referencias.</a:t>
+                      </a:r>
+                    </a:p>
+                  </a:txBody>
+                  <a:tcPr anchor="ctr" marL="109728" marR="91440" marT="36576" marB="36576">
+                    <a:solidFill>
+                      <a:srgbClr val="F2F2F2"/>
+                    </a:solidFill>
+                  </a:tcPr>
+                </a:tc>
+              </a:tr>
+              <a:tr h="477520">
+                <a:tc>
+                  <a:txBody>
+                    <a:bodyPr/>
+                    <a:lstStyle/>
+                    <a:p>
+                      <a:pPr algn="l"/>
+                      <a:r>
+                        <a:rPr sz="1100" b="1" i="0">
+                          <a:solidFill>
+                            <a:srgbClr val="2B2B2B"/>
+                          </a:solidFill>
+                          <a:latin typeface="Calibri"/>
+                        </a:rPr>
+                        <a:t>Sesión 14</a:t>
+                      </a:r>
+                      <a:r>
+                        <a:rPr sz="1100" b="0" i="0">
+                          <a:solidFill>
+                            <a:srgbClr val="2B2B2B"/>
+                          </a:solidFill>
+                          <a:latin typeface="Calibri"/>
+                        </a:rPr>
+                        <a:t> · pendiente</a:t>
+                      </a:r>
+                    </a:p>
+                  </a:txBody>
+                  <a:tcPr anchor="ctr" marL="109728" marR="91440" marT="36576" marB="36576">
+                    <a:solidFill>
+                      <a:srgbClr val="FFFFFF"/>
+                    </a:solidFill>
+                  </a:tcPr>
+                </a:tc>
+                <a:tc>
+                  <a:txBody>
+                    <a:bodyPr/>
+                    <a:lstStyle/>
+                    <a:p>
+                      <a:pPr algn="l"/>
+                      <a:r>
+                        <a:rPr sz="1100" b="1" i="0">
+                          <a:solidFill>
+                            <a:srgbClr val="2B2B2B"/>
+                          </a:solidFill>
+                          <a:latin typeface="Calibri"/>
+                        </a:rPr>
+                        <a:t>Autoevaluación</a:t>
+                      </a:r>
+                      <a:r>
+                        <a:rPr sz="1100" b="0" i="0">
+                          <a:solidFill>
+                            <a:srgbClr val="2B2B2B"/>
+                          </a:solidFill>
+                          <a:latin typeface="Calibri"/>
+                        </a:rPr>
+                        <a:t> · Cuestionario · 2%</a:t>
+                      </a:r>
+                    </a:p>
+                  </a:txBody>
+                  <a:tcPr anchor="ctr" marL="109728" marR="91440" marT="36576" marB="36576">
+                    <a:solidFill>
+                      <a:srgbClr val="FFFFFF"/>
+                    </a:solidFill>
+                  </a:tcPr>
+                </a:tc>
+                <a:tc>
+                  <a:txBody>
+                    <a:bodyPr/>
+                    <a:lstStyle/>
+                    <a:p>
+                      <a:pPr algn="l"/>
+                      <a:r>
+                        <a:rPr sz="1100" b="0" i="0">
+                          <a:solidFill>
+                            <a:srgbClr val="2B2B2B"/>
+                          </a:solidFill>
+                          <a:latin typeface="Calibri"/>
+                        </a:rPr>
+                        <a:t>Diligénciala </a:t>
+                      </a:r>
+                      <a:r>
+                        <a:rPr sz="1100" b="1" i="0">
+                          <a:solidFill>
+                            <a:srgbClr val="2B2B2B"/>
+                          </a:solidFill>
+                          <a:latin typeface="Calibri"/>
+                        </a:rPr>
+                        <a:t>tú</a:t>
+                      </a:r>
+                      <a:r>
+                        <a:rPr sz="1100" b="0" i="0">
+                          <a:solidFill>
+                            <a:srgbClr val="2B2B2B"/>
+                          </a:solidFill>
+                          <a:latin typeface="Calibri"/>
+                        </a:rPr>
+                        <a:t>, dentro de su ventana, sobre tu participación real.</a:t>
+                      </a:r>
+                    </a:p>
+                  </a:txBody>
+                  <a:tcPr anchor="ctr" marL="109728" marR="91440" marT="36576" marB="36576">
+                    <a:solidFill>
+                      <a:srgbClr val="FFFFFF"/>
+                    </a:solidFill>
+                  </a:tcPr>
+                </a:tc>
+              </a:tr>
+              <a:tr h="477520">
+                <a:tc>
+                  <a:txBody>
+                    <a:bodyPr/>
+                    <a:lstStyle/>
+                    <a:p>
+                      <a:pPr algn="l"/>
+                      <a:r>
+                        <a:rPr sz="1100" b="1" i="0">
+                          <a:solidFill>
+                            <a:srgbClr val="2B2B2B"/>
+                          </a:solidFill>
+                          <a:latin typeface="Calibri"/>
+                        </a:rPr>
+                        <a:t>Sesión 14</a:t>
+                      </a:r>
+                      <a:r>
+                        <a:rPr sz="1100" b="0" i="0">
+                          <a:solidFill>
+                            <a:srgbClr val="2B2B2B"/>
+                          </a:solidFill>
+                          <a:latin typeface="Calibri"/>
+                        </a:rPr>
+                        <a:t> · pendiente</a:t>
+                      </a:r>
+                    </a:p>
+                  </a:txBody>
+                  <a:tcPr anchor="ctr" marL="109728" marR="91440" marT="36576" marB="36576">
+                    <a:solidFill>
+                      <a:srgbClr val="F2F2F2"/>
+                    </a:solidFill>
+                  </a:tcPr>
+                </a:tc>
+                <a:tc>
+                  <a:txBody>
+                    <a:bodyPr/>
+                    <a:lstStyle/>
+                    <a:p>
+                      <a:pPr algn="l"/>
+                      <a:r>
+                        <a:rPr sz="1100" b="1" i="0">
+                          <a:solidFill>
+                            <a:srgbClr val="2B2B2B"/>
+                          </a:solidFill>
+                          <a:latin typeface="Calibri"/>
+                        </a:rPr>
+                        <a:t>Coevaluación</a:t>
+                      </a:r>
+                      <a:r>
+                        <a:rPr sz="1100" b="0" i="0">
+                          <a:solidFill>
+                            <a:srgbClr val="2B2B2B"/>
+                          </a:solidFill>
+                          <a:latin typeface="Calibri"/>
+                        </a:rPr>
+                        <a:t> · Foro · 2%</a:t>
+                      </a:r>
+                    </a:p>
+                  </a:txBody>
+                  <a:tcPr anchor="ctr" marL="109728" marR="91440" marT="36576" marB="36576">
+                    <a:solidFill>
+                      <a:srgbClr val="F2F2F2"/>
+                    </a:solidFill>
+                  </a:tcPr>
+                </a:tc>
+                <a:tc>
+                  <a:txBody>
+                    <a:bodyPr/>
+                    <a:lstStyle/>
+                    <a:p>
+                      <a:pPr algn="l"/>
+                      <a:r>
+                        <a:rPr sz="1100" b="1" i="0">
+                          <a:solidFill>
+                            <a:srgbClr val="2B2B2B"/>
+                          </a:solidFill>
+                          <a:latin typeface="Calibri"/>
+                        </a:rPr>
+                        <a:t>Publica</a:t>
+                      </a:r>
+                      <a:r>
+                        <a:rPr sz="1100" b="0" i="0">
+                          <a:solidFill>
+                            <a:srgbClr val="2B2B2B"/>
+                          </a:solidFill>
+                          <a:latin typeface="Calibri"/>
+                        </a:rPr>
+                        <a:t> tu aporte dentro de la ventana: un borrador sin enviar no cuenta.</a:t>
+                      </a:r>
+                    </a:p>
+                  </a:txBody>
+                  <a:tcPr anchor="ctr" marL="109728" marR="91440" marT="36576" marB="36576">
+                    <a:solidFill>
+                      <a:srgbClr val="F2F2F2"/>
+                    </a:solidFill>
+                  </a:tcPr>
+                </a:tc>
+              </a:tr>
+            </a:tbl>
+          </a:graphicData>
+        </a:graphic>
+      </p:graphicFrame>
+      <p:sp>
+        <p:nvSpPr>
+          <p:cNvPr id="6" name="TextBox 5"/>
+          <p:cNvSpPr txBox="1"/>
+          <p:nvPr/>
+        </p:nvSpPr>
+        <p:spPr>
+          <a:xfrm>
+            <a:off x="640080" y="6080760"/>
+            <a:ext cx="10911535" cy="548640"/>
+          </a:xfrm>
+          <a:prstGeom prst="rect">
+            <a:avLst/>
+          </a:prstGeom>
+          <a:noFill/>
+        </p:spPr>
+        <p:txBody>
+          <a:bodyPr wrap="square" anchor="t" lIns="0" rIns="0" tIns="0" bIns="0">
+            <a:spAutoFit/>
+          </a:bodyPr>
+          <a:lstStyle/>
+          <a:p>
+            <a:r>
+              <a:rPr sz="1200" b="0" i="1">
+                <a:solidFill>
+                  <a:srgbClr val="2B2B2B"/>
+                </a:solidFill>
+                <a:latin typeface="Calibri"/>
+              </a:rPr>
+              <a:t>Esta misma tabla va al final de todas las sesiones. La </a:t>
+            </a:r>
+            <a:r>
+              <a:rPr sz="1200" b="1" i="1">
+                <a:solidFill>
+                  <a:srgbClr val="2B2B2B"/>
+                </a:solidFill>
+                <a:latin typeface="Calibri"/>
+              </a:rPr>
+              <a:t>fecha</a:t>
+            </a:r>
+            <a:r>
+              <a:rPr sz="1200" b="0" i="1">
+                <a:solidFill>
+                  <a:srgbClr val="2B2B2B"/>
+                </a:solidFill>
+                <a:latin typeface="Calibri"/>
+              </a:rPr>
+              <a:t> de cada ventana está en el enunciado del ítem (`Clases/Recursos/ACAs/`) y en el aula: si el aula y cualquier otro material se contradicen, </a:t>
+            </a:r>
+            <a:r>
+              <a:rPr sz="1200" b="1" i="1">
+                <a:solidFill>
+                  <a:srgbClr val="2B2B2B"/>
+                </a:solidFill>
+                <a:latin typeface="Calibri"/>
+              </a:rPr>
+              <a:t>manda el aula</a:t>
+            </a:r>
+            <a:r>
+              <a:rPr sz="1200" b="0" i="1">
+                <a:solidFill>
+                  <a:srgbClr val="2B2B2B"/>
+                </a:solidFill>
+                <a:latin typeface="Calibri"/>
+              </a:rPr>
+              <a:t>.</a:t>
+            </a:r>
+          </a:p>
+        </p:txBody>
+      </p:sp>
+      <p:sp>
+        <p:nvSpPr>
+          <p:cNvPr id="7" name="TextBox 6"/>
+          <p:cNvSpPr txBox="1"/>
+          <p:nvPr/>
+        </p:nvSpPr>
+        <p:spPr>
+          <a:xfrm>
+            <a:off x="11094415" y="6446520"/>
+            <a:ext cx="548640" cy="274320"/>
+          </a:xfrm>
+          <a:prstGeom prst="rect">
+            <a:avLst/>
+          </a:prstGeom>
+          <a:noFill/>
+        </p:spPr>
+        <p:txBody>
+          <a:bodyPr wrap="square" anchor="t" lIns="0" rIns="0" tIns="0" bIns="0">
+            <a:spAutoFit/>
+          </a:bodyPr>
+          <a:lstStyle/>
+          <a:p>
+            <a:pPr algn="r"/>
+            <a:r>
+              <a:rPr sz="1000" b="1" i="0">
+                <a:solidFill>
+                  <a:srgbClr val="8F989D"/>
+                </a:solidFill>
+                <a:latin typeface="Calibri"/>
+              </a:rPr>
+              <a:t>24</a:t>
+            </a:r>
+          </a:p>
+        </p:txBody>
+      </p:sp>
+    </p:spTree>
+  </p:cSld>
+  <p:clrMapOvr>
+    <a:masterClrMapping/>
+  </p:clrMapOvr>
+</p:sld>
+</file>
+
+<file path=ppt/slides/slide25.xml><?xml version="1.0" encoding="utf-8"?>
 <p:sld xmlns:a="http://schemas.openxmlformats.org/drawingml/2006/main" xmlns:p="http://schemas.openxmlformats.org/presentationml/2006/main" xmlns:r="http://schemas.openxmlformats.org/officeDocument/2006/relationships">
   <p:cSld>
     <p:bg>
@@ -11050,7 +12602,7 @@
                 </a:solidFill>
                 <a:latin typeface="Calibri"/>
               </a:rPr>
-              <a:t>3. Coherencia del artículo</a:t>
+              <a:t>3. Coherencia del documento</a:t>
             </a:r>
             <a:r>
               <a:rPr sz="1600" b="0" i="0">
@@ -12284,7 +13836,7 @@
                 </a:solidFill>
                 <a:latin typeface="Calibri"/>
               </a:rPr>
-              <a:t>Cómo se escribe un guion oral (no es leer el artículo)</a:t>
+              <a:t>Cómo se escribe un guion oral (no es leer el documento)</a:t>
             </a:r>
           </a:p>
         </p:txBody>
@@ -12681,7 +14233,7 @@
                 </a:solidFill>
                 <a:latin typeface="Calibri"/>
               </a:rPr>
-              <a:t>Cómo se escribe un guion oral (no es leer el artículo) (cont.)</a:t>
+              <a:t>Cómo se escribe un guion oral (no es leer el documento) (cont.)</a:t>
             </a:r>
           </a:p>
         </p:txBody>
@@ -13381,7 +14933,7 @@
                 </a:solidFill>
                 <a:latin typeface="Calibri"/>
               </a:rPr>
-              <a:t>, tal como está en el artículo.</a:t>
+              <a:t>, tal como está en el documento.</a:t>
             </a:r>
           </a:p>
           <a:p>
